--- a/public/lessons/year-6-maths/summer/week-30/retrieve-geometry-and-statistics/teaching-powerpoint-v1.pptx
+++ b/public/lessons/year-6-maths/summer/week-30/retrieve-geometry-and-statistics/teaching-powerpoint-v1.pptx
@@ -2,24 +2,24 @@
 <file path=ppt/presentation.xml><?xml version="1.0" encoding="utf-8"?>
 <p:presentation xmlns:p="http://schemas.openxmlformats.org/presentationml/2006/main">
   <p:sldMasterIdLst>
-    <p:sldMasterId xmlns:r="http://schemas.openxmlformats.org/officeDocument/2006/relationships" id="2147483648" r:id="Redf7c468aa304900"/>
+    <p:sldMasterId xmlns:r="http://schemas.openxmlformats.org/officeDocument/2006/relationships" id="2147483648" r:id="Rd93edc30ce0a445b"/>
   </p:sldMasterIdLst>
   <p:notesMasterIdLst>
-    <p:notesMasterId xmlns:r="http://schemas.openxmlformats.org/officeDocument/2006/relationships" r:id="Re23fe38112e74eb3"/>
+    <p:notesMasterId xmlns:r="http://schemas.openxmlformats.org/officeDocument/2006/relationships" r:id="R1c806939542d48dd"/>
   </p:notesMasterIdLst>
   <p:sldIdLst>
-    <p:sldId xmlns:r="http://schemas.openxmlformats.org/officeDocument/2006/relationships" id="256" r:id="R39b570c06411449f"/>
-    <p:sldId xmlns:r="http://schemas.openxmlformats.org/officeDocument/2006/relationships" id="257" r:id="R0b69db7cdc844ffc"/>
-    <p:sldId xmlns:r="http://schemas.openxmlformats.org/officeDocument/2006/relationships" id="258" r:id="R43438898b3d14ea2"/>
-    <p:sldId xmlns:r="http://schemas.openxmlformats.org/officeDocument/2006/relationships" id="259" r:id="Re1b9194defa149ba"/>
-    <p:sldId xmlns:r="http://schemas.openxmlformats.org/officeDocument/2006/relationships" id="260" r:id="Rd16f608f5d8b47bf"/>
-    <p:sldId xmlns:r="http://schemas.openxmlformats.org/officeDocument/2006/relationships" id="261" r:id="Rfe80e68aee3f4b99"/>
-    <p:sldId xmlns:r="http://schemas.openxmlformats.org/officeDocument/2006/relationships" id="262" r:id="R8b1a560feb944003"/>
-    <p:sldId xmlns:r="http://schemas.openxmlformats.org/officeDocument/2006/relationships" id="263" r:id="R7033001674b747ac"/>
-    <p:sldId xmlns:r="http://schemas.openxmlformats.org/officeDocument/2006/relationships" id="264" r:id="Rc566d50fa196417a"/>
-    <p:sldId xmlns:r="http://schemas.openxmlformats.org/officeDocument/2006/relationships" id="265" r:id="Re49fc2abd9f14789"/>
-    <p:sldId xmlns:r="http://schemas.openxmlformats.org/officeDocument/2006/relationships" id="266" r:id="R3cae45a75af04dfe"/>
-    <p:sldId xmlns:r="http://schemas.openxmlformats.org/officeDocument/2006/relationships" id="267" r:id="Ree50a755c3fa4297"/>
+    <p:sldId xmlns:r="http://schemas.openxmlformats.org/officeDocument/2006/relationships" id="256" r:id="Rcae9df834968485b"/>
+    <p:sldId xmlns:r="http://schemas.openxmlformats.org/officeDocument/2006/relationships" id="257" r:id="Rf80a0a6d8a7548b1"/>
+    <p:sldId xmlns:r="http://schemas.openxmlformats.org/officeDocument/2006/relationships" id="258" r:id="R6a1dd0e55ac143b1"/>
+    <p:sldId xmlns:r="http://schemas.openxmlformats.org/officeDocument/2006/relationships" id="259" r:id="Ra73aa64b475d4174"/>
+    <p:sldId xmlns:r="http://schemas.openxmlformats.org/officeDocument/2006/relationships" id="260" r:id="Rebf99e3bc8804066"/>
+    <p:sldId xmlns:r="http://schemas.openxmlformats.org/officeDocument/2006/relationships" id="261" r:id="R20aeae6912fe4f82"/>
+    <p:sldId xmlns:r="http://schemas.openxmlformats.org/officeDocument/2006/relationships" id="262" r:id="Rda42b5b127484730"/>
+    <p:sldId xmlns:r="http://schemas.openxmlformats.org/officeDocument/2006/relationships" id="263" r:id="R2cc0639e8392480a"/>
+    <p:sldId xmlns:r="http://schemas.openxmlformats.org/officeDocument/2006/relationships" id="264" r:id="R5aa7acb05d284161"/>
+    <p:sldId xmlns:r="http://schemas.openxmlformats.org/officeDocument/2006/relationships" id="265" r:id="Rb61b8a6708ff4132"/>
+    <p:sldId xmlns:r="http://schemas.openxmlformats.org/officeDocument/2006/relationships" id="266" r:id="R2003b0a10ae1468e"/>
+    <p:sldId xmlns:r="http://schemas.openxmlformats.org/officeDocument/2006/relationships" id="267" r:id="Rde32fe211fa84be5"/>
   </p:sldIdLst>
   <p:sldSz cx="12192000" cy="6858000"/>
   <p:notesSz cx="6858000" cy="9144000"/>
@@ -873,7 +873,7 @@
           <a:lstStyle xmlns:a="http://schemas.openxmlformats.org/drawingml/2006/main"/>
           <a:p xmlns:a="http://schemas.openxmlformats.org/drawingml/2006/main">
             <a:r>
-              <a:t>I do. Reveal the question, setup and each calculation stage one click at a time. Pupils watch before copying. Model answer: 99 cm2 and 20.</a:t>
+              <a:t>I do. Reveal the question, then reveal each mathematical change one click at a time. Point to the numbers and operation that changed before moving to the next line. Final answer: 99 cm2 and 20.</a:t>
             </a:r>
           </a:p>
         </p:txBody>
@@ -1291,7 +1291,7 @@
   </p:cSld>
   <p:clrMap bg1="lt1" tx1="dk1" bg2="lt2" tx2="dk2" accent1="accent1" accent2="accent2" accent3="accent3" accent4="accent4" accent5="accent5" accent6="accent6" hlink="hlink" folHlink="folHlink"/>
   <p:sldLayoutIdLst>
-    <p:sldLayoutId xmlns:r="http://schemas.openxmlformats.org/officeDocument/2006/relationships" id="2147483649" r:id="Rc967b978190d4449"/>
+    <p:sldLayoutId xmlns:r="http://schemas.openxmlformats.org/officeDocument/2006/relationships" id="2147483649" r:id="Rd7c8b92a915349c4"/>
   </p:sldLayoutIdLst>
   <p:txStyles>
     <p:titleStyle>
@@ -1842,7 +1842,7 @@
           <p:cNvPr id="12" name="">
             <a:extLst xmlns:a="http://schemas.openxmlformats.org/drawingml/2006/main">
               <a:ext uri="{FF2B5EF4-FFF2-40B4-BE49-F238E27FC236}">
-                <a16:creationId xmlns:a16="http://schemas.microsoft.com/office/drawing/2014/main" id="{889EA2E2-9B38-4E79-A384-53483F781749}"/>
+                <a16:creationId xmlns:a16="http://schemas.microsoft.com/office/drawing/2014/main" id="{8D28AD39-95AD-45EB-949D-4D29F5D75FCF}"/>
               </a:ext>
             </a:extLst>
           </p:cNvPr>
@@ -1874,7 +1874,7 @@
           <p:cNvPr id="2" name="">
             <a:extLst xmlns:a="http://schemas.openxmlformats.org/drawingml/2006/main">
               <a:ext uri="{FF2B5EF4-FFF2-40B4-BE49-F238E27FC236}">
-                <a16:creationId xmlns:a16="http://schemas.microsoft.com/office/drawing/2014/main" id="{CECA6E4C-B597-4C1B-97B5-F95F58C4A8A5}"/>
+                <a16:creationId xmlns:a16="http://schemas.microsoft.com/office/drawing/2014/main" id="{BE604FF7-A7DC-407F-BF02-76AB31AA292A}"/>
               </a:ext>
             </a:extLst>
           </p:cNvPr>
@@ -1931,7 +1931,7 @@
           <p:cNvPr id="3" name="">
             <a:extLst xmlns:a="http://schemas.openxmlformats.org/drawingml/2006/main">
               <a:ext uri="{FF2B5EF4-FFF2-40B4-BE49-F238E27FC236}">
-                <a16:creationId xmlns:a16="http://schemas.microsoft.com/office/drawing/2014/main" id="{F5B42091-36EC-4BF1-97B8-164E663E574E}"/>
+                <a16:creationId xmlns:a16="http://schemas.microsoft.com/office/drawing/2014/main" id="{3CDF1BC5-AFF8-4C3B-B68E-DEEB72EC4DEE}"/>
               </a:ext>
             </a:extLst>
           </p:cNvPr>
@@ -1965,7 +1965,7 @@
           <p:cNvPr id="4" name="">
             <a:extLst xmlns:a="http://schemas.openxmlformats.org/drawingml/2006/main">
               <a:ext uri="{FF2B5EF4-FFF2-40B4-BE49-F238E27FC236}">
-                <a16:creationId xmlns:a16="http://schemas.microsoft.com/office/drawing/2014/main" id="{B1B0238B-B8B2-4E41-BC04-5FDC0F4D691F}"/>
+                <a16:creationId xmlns:a16="http://schemas.microsoft.com/office/drawing/2014/main" id="{33542058-225B-4D22-AFD0-C7E3795BC285}"/>
               </a:ext>
             </a:extLst>
           </p:cNvPr>
@@ -2022,7 +2022,7 @@
           <p:cNvPr id="5" name="">
             <a:extLst xmlns:a="http://schemas.openxmlformats.org/drawingml/2006/main">
               <a:ext uri="{FF2B5EF4-FFF2-40B4-BE49-F238E27FC236}">
-                <a16:creationId xmlns:a16="http://schemas.microsoft.com/office/drawing/2014/main" id="{5050D434-BD99-49C3-8FA6-7921B4095F9A}"/>
+                <a16:creationId xmlns:a16="http://schemas.microsoft.com/office/drawing/2014/main" id="{F372707C-5F15-4708-82D1-7E3E7C7C2AAF}"/>
               </a:ext>
             </a:extLst>
           </p:cNvPr>
@@ -2079,7 +2079,7 @@
           <p:cNvPr id="6" name="">
             <a:extLst xmlns:a="http://schemas.openxmlformats.org/drawingml/2006/main">
               <a:ext uri="{FF2B5EF4-FFF2-40B4-BE49-F238E27FC236}">
-                <a16:creationId xmlns:a16="http://schemas.microsoft.com/office/drawing/2014/main" id="{C426CED8-E54A-407E-8CF4-EE06DE0B0109}"/>
+                <a16:creationId xmlns:a16="http://schemas.microsoft.com/office/drawing/2014/main" id="{A759E32F-9958-4BB5-8937-D57BEF003D19}"/>
               </a:ext>
             </a:extLst>
           </p:cNvPr>
@@ -2113,7 +2113,7 @@
           <p:cNvPr id="7" name="">
             <a:extLst xmlns:a="http://schemas.openxmlformats.org/drawingml/2006/main">
               <a:ext uri="{FF2B5EF4-FFF2-40B4-BE49-F238E27FC236}">
-                <a16:creationId xmlns:a16="http://schemas.microsoft.com/office/drawing/2014/main" id="{153E6A0D-C332-439F-8A6B-BDA8E287F407}"/>
+                <a16:creationId xmlns:a16="http://schemas.microsoft.com/office/drawing/2014/main" id="{8CDA1886-92EC-40B5-8DAA-53C2CB4661E9}"/>
               </a:ext>
             </a:extLst>
           </p:cNvPr>
@@ -2170,7 +2170,7 @@
           <p:cNvPr id="8" name="">
             <a:extLst xmlns:a="http://schemas.openxmlformats.org/drawingml/2006/main">
               <a:ext uri="{FF2B5EF4-FFF2-40B4-BE49-F238E27FC236}">
-                <a16:creationId xmlns:a16="http://schemas.microsoft.com/office/drawing/2014/main" id="{EE2962D7-E484-4104-A395-E24479C9622A}"/>
+                <a16:creationId xmlns:a16="http://schemas.microsoft.com/office/drawing/2014/main" id="{7EAB9C60-D79B-4082-BA7E-A3D21355BFE8}"/>
               </a:ext>
             </a:extLst>
           </p:cNvPr>
@@ -2227,7 +2227,7 @@
           <p:cNvPr id="9" name="">
             <a:extLst xmlns:a="http://schemas.openxmlformats.org/drawingml/2006/main">
               <a:ext uri="{FF2B5EF4-FFF2-40B4-BE49-F238E27FC236}">
-                <a16:creationId xmlns:a16="http://schemas.microsoft.com/office/drawing/2014/main" id="{7C908EDB-03F0-4730-8C3B-25DE66EF66FD}"/>
+                <a16:creationId xmlns:a16="http://schemas.microsoft.com/office/drawing/2014/main" id="{D6545948-48C4-4FD8-9C10-4674ECAC904F}"/>
               </a:ext>
             </a:extLst>
           </p:cNvPr>
@@ -2284,7 +2284,7 @@
           <p:cNvPr id="10" name="">
             <a:extLst xmlns:a="http://schemas.openxmlformats.org/drawingml/2006/main">
               <a:ext uri="{FF2B5EF4-FFF2-40B4-BE49-F238E27FC236}">
-                <a16:creationId xmlns:a16="http://schemas.microsoft.com/office/drawing/2014/main" id="{4EE38258-51C8-40C9-9D47-D851009069CE}"/>
+                <a16:creationId xmlns:a16="http://schemas.microsoft.com/office/drawing/2014/main" id="{0C4EF597-7232-4932-B8D1-C084A504D785}"/>
               </a:ext>
             </a:extLst>
           </p:cNvPr>
@@ -2341,7 +2341,7 @@
           <p:cNvPr id="11" name="">
             <a:extLst xmlns:a="http://schemas.openxmlformats.org/drawingml/2006/main">
               <a:ext uri="{FF2B5EF4-FFF2-40B4-BE49-F238E27FC236}">
-                <a16:creationId xmlns:a16="http://schemas.microsoft.com/office/drawing/2014/main" id="{1475DEA9-4F4C-483B-982E-4E967EE77ECC}"/>
+                <a16:creationId xmlns:a16="http://schemas.microsoft.com/office/drawing/2014/main" id="{B92BE72F-354E-49EC-A98D-EF2352E66B2C}"/>
               </a:ext>
             </a:extLst>
           </p:cNvPr>
@@ -2396,7 +2396,7 @@
     </p:spTree>
     <p:extLst>
       <p:ext uri="{BB962C8B-B14F-4D97-AF65-F5344CB8AC3E}">
-        <p14:creationId xmlns:p14="http://schemas.microsoft.com/office/powerpoint/2010/main" val="1400856299"/>
+        <p14:creationId xmlns:p14="http://schemas.microsoft.com/office/powerpoint/2010/main" val="171212940"/>
       </p:ext>
     </p:extLst>
   </p:cSld>
@@ -2427,7 +2427,7 @@
           <p:cNvPr id="14" name="">
             <a:extLst xmlns:a="http://schemas.openxmlformats.org/drawingml/2006/main">
               <a:ext uri="{FF2B5EF4-FFF2-40B4-BE49-F238E27FC236}">
-                <a16:creationId xmlns:a16="http://schemas.microsoft.com/office/drawing/2014/main" id="{ACF6572A-4125-449B-8A10-7DDACCB16759}"/>
+                <a16:creationId xmlns:a16="http://schemas.microsoft.com/office/drawing/2014/main" id="{C9B176DA-3B4B-488E-A393-BC5C983307F4}"/>
               </a:ext>
             </a:extLst>
           </p:cNvPr>
@@ -2459,7 +2459,7 @@
           <p:cNvPr id="2" name="">
             <a:extLst xmlns:a="http://schemas.openxmlformats.org/drawingml/2006/main">
               <a:ext uri="{FF2B5EF4-FFF2-40B4-BE49-F238E27FC236}">
-                <a16:creationId xmlns:a16="http://schemas.microsoft.com/office/drawing/2014/main" id="{5341AA1F-0966-4AE5-85CC-A8E9DE3A2C53}"/>
+                <a16:creationId xmlns:a16="http://schemas.microsoft.com/office/drawing/2014/main" id="{6743AB88-B404-49D4-82F5-1945D318D33C}"/>
               </a:ext>
             </a:extLst>
           </p:cNvPr>
@@ -2516,7 +2516,7 @@
           <p:cNvPr id="3" name="">
             <a:extLst xmlns:a="http://schemas.openxmlformats.org/drawingml/2006/main">
               <a:ext uri="{FF2B5EF4-FFF2-40B4-BE49-F238E27FC236}">
-                <a16:creationId xmlns:a16="http://schemas.microsoft.com/office/drawing/2014/main" id="{4B223AD4-A5FE-4C6D-BD9C-DEF3A195C154}"/>
+                <a16:creationId xmlns:a16="http://schemas.microsoft.com/office/drawing/2014/main" id="{3FA9C1BB-B398-466F-850D-315A08EAF6D8}"/>
               </a:ext>
             </a:extLst>
           </p:cNvPr>
@@ -2548,7 +2548,7 @@
           <p:cNvPr id="4" name="">
             <a:extLst xmlns:a="http://schemas.openxmlformats.org/drawingml/2006/main">
               <a:ext uri="{FF2B5EF4-FFF2-40B4-BE49-F238E27FC236}">
-                <a16:creationId xmlns:a16="http://schemas.microsoft.com/office/drawing/2014/main" id="{22D99C05-6C67-4020-9564-43E35BB869A1}"/>
+                <a16:creationId xmlns:a16="http://schemas.microsoft.com/office/drawing/2014/main" id="{25BB39E1-9CD8-4D40-9D90-4E3C7514A511}"/>
               </a:ext>
             </a:extLst>
           </p:cNvPr>
@@ -2605,7 +2605,7 @@
           <p:cNvPr id="5" name="">
             <a:extLst xmlns:a="http://schemas.openxmlformats.org/drawingml/2006/main">
               <a:ext uri="{FF2B5EF4-FFF2-40B4-BE49-F238E27FC236}">
-                <a16:creationId xmlns:a16="http://schemas.microsoft.com/office/drawing/2014/main" id="{B0799781-30ED-4A11-8570-0DCCF5196E61}"/>
+                <a16:creationId xmlns:a16="http://schemas.microsoft.com/office/drawing/2014/main" id="{106FF570-E431-40A3-B659-4C532C1E4E5E}"/>
               </a:ext>
             </a:extLst>
           </p:cNvPr>
@@ -2662,7 +2662,7 @@
           <p:cNvPr id="6" name="">
             <a:extLst xmlns:a="http://schemas.openxmlformats.org/drawingml/2006/main">
               <a:ext uri="{FF2B5EF4-FFF2-40B4-BE49-F238E27FC236}">
-                <a16:creationId xmlns:a16="http://schemas.microsoft.com/office/drawing/2014/main" id="{252E12ED-52B1-4D27-82A1-86EABCC4675D}"/>
+                <a16:creationId xmlns:a16="http://schemas.microsoft.com/office/drawing/2014/main" id="{42ACDF07-3BF0-4CC0-94E9-217C35CF2DB2}"/>
               </a:ext>
             </a:extLst>
           </p:cNvPr>
@@ -2719,7 +2719,7 @@
           <p:cNvPr id="7" name="">
             <a:extLst xmlns:a="http://schemas.openxmlformats.org/drawingml/2006/main">
               <a:ext uri="{FF2B5EF4-FFF2-40B4-BE49-F238E27FC236}">
-                <a16:creationId xmlns:a16="http://schemas.microsoft.com/office/drawing/2014/main" id="{4A4F11CD-1CDA-49A9-A9F2-560D7E1950B1}"/>
+                <a16:creationId xmlns:a16="http://schemas.microsoft.com/office/drawing/2014/main" id="{6248F9EB-051E-495E-82EA-E1A2699AFC89}"/>
               </a:ext>
             </a:extLst>
           </p:cNvPr>
@@ -2751,7 +2751,7 @@
           <p:cNvPr id="8" name="">
             <a:extLst xmlns:a="http://schemas.openxmlformats.org/drawingml/2006/main">
               <a:ext uri="{FF2B5EF4-FFF2-40B4-BE49-F238E27FC236}">
-                <a16:creationId xmlns:a16="http://schemas.microsoft.com/office/drawing/2014/main" id="{A326FF5D-2EDD-46BD-893C-04A7184CA7BD}"/>
+                <a16:creationId xmlns:a16="http://schemas.microsoft.com/office/drawing/2014/main" id="{98E5B127-EAF9-45FE-A7BE-919153A37388}"/>
               </a:ext>
             </a:extLst>
           </p:cNvPr>
@@ -2808,7 +2808,7 @@
           <p:cNvPr id="9" name="">
             <a:extLst xmlns:a="http://schemas.openxmlformats.org/drawingml/2006/main">
               <a:ext uri="{FF2B5EF4-FFF2-40B4-BE49-F238E27FC236}">
-                <a16:creationId xmlns:a16="http://schemas.microsoft.com/office/drawing/2014/main" id="{EFD361FC-09E4-4486-9029-6785FB920FE4}"/>
+                <a16:creationId xmlns:a16="http://schemas.microsoft.com/office/drawing/2014/main" id="{A64FEEB4-D0C9-4583-9C90-F8D75164A303}"/>
               </a:ext>
             </a:extLst>
           </p:cNvPr>
@@ -2865,7 +2865,7 @@
           <p:cNvPr id="10" name="">
             <a:extLst xmlns:a="http://schemas.openxmlformats.org/drawingml/2006/main">
               <a:ext uri="{FF2B5EF4-FFF2-40B4-BE49-F238E27FC236}">
-                <a16:creationId xmlns:a16="http://schemas.microsoft.com/office/drawing/2014/main" id="{998CA24A-E097-47CA-8320-950D7306D449}"/>
+                <a16:creationId xmlns:a16="http://schemas.microsoft.com/office/drawing/2014/main" id="{BB07F7C7-AD5E-4B2E-A21B-07FF732D332B}"/>
               </a:ext>
             </a:extLst>
           </p:cNvPr>
@@ -2922,7 +2922,7 @@
           <p:cNvPr id="11" name="">
             <a:extLst xmlns:a="http://schemas.openxmlformats.org/drawingml/2006/main">
               <a:ext uri="{FF2B5EF4-FFF2-40B4-BE49-F238E27FC236}">
-                <a16:creationId xmlns:a16="http://schemas.microsoft.com/office/drawing/2014/main" id="{627E4109-4425-4B10-91B9-D07A70A04F7B}"/>
+                <a16:creationId xmlns:a16="http://schemas.microsoft.com/office/drawing/2014/main" id="{6723ED8E-3B58-4DDF-959E-0625437FB5BB}"/>
               </a:ext>
             </a:extLst>
           </p:cNvPr>
@@ -2979,7 +2979,7 @@
           <p:cNvPr id="12" name="">
             <a:extLst xmlns:a="http://schemas.openxmlformats.org/drawingml/2006/main">
               <a:ext uri="{FF2B5EF4-FFF2-40B4-BE49-F238E27FC236}">
-                <a16:creationId xmlns:a16="http://schemas.microsoft.com/office/drawing/2014/main" id="{8ABB9BA2-FCFF-4297-82C2-5418ECFCFB02}"/>
+                <a16:creationId xmlns:a16="http://schemas.microsoft.com/office/drawing/2014/main" id="{B44375D8-A6D8-4C11-8202-20A3AB3F6F50}"/>
               </a:ext>
             </a:extLst>
           </p:cNvPr>
@@ -3036,7 +3036,7 @@
           <p:cNvPr id="13" name="">
             <a:extLst xmlns:a="http://schemas.openxmlformats.org/drawingml/2006/main">
               <a:ext uri="{FF2B5EF4-FFF2-40B4-BE49-F238E27FC236}">
-                <a16:creationId xmlns:a16="http://schemas.microsoft.com/office/drawing/2014/main" id="{6F922BD7-E24E-468D-8548-C8B19D6ACFA5}"/>
+                <a16:creationId xmlns:a16="http://schemas.microsoft.com/office/drawing/2014/main" id="{F8EBE8A2-ABC4-4098-A67B-C3B27FB298DA}"/>
               </a:ext>
             </a:extLst>
           </p:cNvPr>
@@ -3091,7 +3091,7 @@
     </p:spTree>
     <p:extLst>
       <p:ext uri="{BB962C8B-B14F-4D97-AF65-F5344CB8AC3E}">
-        <p14:creationId xmlns:p14="http://schemas.microsoft.com/office/powerpoint/2010/main" val="224224302"/>
+        <p14:creationId xmlns:p14="http://schemas.microsoft.com/office/powerpoint/2010/main" val="565415079"/>
       </p:ext>
     </p:extLst>
   </p:cSld>
@@ -3292,7 +3292,7 @@
           <p:cNvPr id="19" name="">
             <a:extLst xmlns:a="http://schemas.openxmlformats.org/drawingml/2006/main">
               <a:ext uri="{FF2B5EF4-FFF2-40B4-BE49-F238E27FC236}">
-                <a16:creationId xmlns:a16="http://schemas.microsoft.com/office/drawing/2014/main" id="{4124A5F5-E03D-43B2-83F2-A43000303D02}"/>
+                <a16:creationId xmlns:a16="http://schemas.microsoft.com/office/drawing/2014/main" id="{5FF36B6A-D2DD-441E-8FA0-D66776D2E6C7}"/>
               </a:ext>
             </a:extLst>
           </p:cNvPr>
@@ -3324,7 +3324,7 @@
           <p:cNvPr id="2" name="">
             <a:extLst xmlns:a="http://schemas.openxmlformats.org/drawingml/2006/main">
               <a:ext uri="{FF2B5EF4-FFF2-40B4-BE49-F238E27FC236}">
-                <a16:creationId xmlns:a16="http://schemas.microsoft.com/office/drawing/2014/main" id="{BE44509B-EC0B-4FEA-9D99-0596AA9B6CD9}"/>
+                <a16:creationId xmlns:a16="http://schemas.microsoft.com/office/drawing/2014/main" id="{E14D65CB-79F1-4A08-B22F-86AB7BF8CC56}"/>
               </a:ext>
             </a:extLst>
           </p:cNvPr>
@@ -3381,7 +3381,7 @@
           <p:cNvPr id="3" name="">
             <a:extLst xmlns:a="http://schemas.openxmlformats.org/drawingml/2006/main">
               <a:ext uri="{FF2B5EF4-FFF2-40B4-BE49-F238E27FC236}">
-                <a16:creationId xmlns:a16="http://schemas.microsoft.com/office/drawing/2014/main" id="{1F1F2B89-2A47-428D-8AF7-88F14B3E2C5A}"/>
+                <a16:creationId xmlns:a16="http://schemas.microsoft.com/office/drawing/2014/main" id="{07F2FA90-6E5F-4ABD-AB85-2A74E15CEA99}"/>
               </a:ext>
             </a:extLst>
           </p:cNvPr>
@@ -3413,7 +3413,7 @@
           <p:cNvPr id="4" name="">
             <a:extLst xmlns:a="http://schemas.openxmlformats.org/drawingml/2006/main">
               <a:ext uri="{FF2B5EF4-FFF2-40B4-BE49-F238E27FC236}">
-                <a16:creationId xmlns:a16="http://schemas.microsoft.com/office/drawing/2014/main" id="{4817B627-F601-443D-ABDF-3846086AC7DD}"/>
+                <a16:creationId xmlns:a16="http://schemas.microsoft.com/office/drawing/2014/main" id="{266813FD-BF0D-438A-87BF-2A9056D032CD}"/>
               </a:ext>
             </a:extLst>
           </p:cNvPr>
@@ -3470,7 +3470,7 @@
           <p:cNvPr id="5" name="">
             <a:extLst xmlns:a="http://schemas.openxmlformats.org/drawingml/2006/main">
               <a:ext uri="{FF2B5EF4-FFF2-40B4-BE49-F238E27FC236}">
-                <a16:creationId xmlns:a16="http://schemas.microsoft.com/office/drawing/2014/main" id="{28E727B2-7B11-448C-A610-10723A4A08E2}"/>
+                <a16:creationId xmlns:a16="http://schemas.microsoft.com/office/drawing/2014/main" id="{8F8F92AD-6EC3-4852-AE2C-4D8D9E792A14}"/>
               </a:ext>
             </a:extLst>
           </p:cNvPr>
@@ -3527,7 +3527,7 @@
           <p:cNvPr id="6" name="">
             <a:extLst xmlns:a="http://schemas.openxmlformats.org/drawingml/2006/main">
               <a:ext uri="{FF2B5EF4-FFF2-40B4-BE49-F238E27FC236}">
-                <a16:creationId xmlns:a16="http://schemas.microsoft.com/office/drawing/2014/main" id="{05579AB2-0051-4C37-A22C-7BEE41AB5122}"/>
+                <a16:creationId xmlns:a16="http://schemas.microsoft.com/office/drawing/2014/main" id="{EC54E8A4-46DA-42BF-9E4E-7122CFEB155F}"/>
               </a:ext>
             </a:extLst>
           </p:cNvPr>
@@ -3584,7 +3584,7 @@
           <p:cNvPr id="7" name="">
             <a:extLst xmlns:a="http://schemas.openxmlformats.org/drawingml/2006/main">
               <a:ext uri="{FF2B5EF4-FFF2-40B4-BE49-F238E27FC236}">
-                <a16:creationId xmlns:a16="http://schemas.microsoft.com/office/drawing/2014/main" id="{87BB966D-36DC-4167-A814-E2EB55FD9960}"/>
+                <a16:creationId xmlns:a16="http://schemas.microsoft.com/office/drawing/2014/main" id="{268FDC61-725E-4B8C-B3D6-EF7BC33BBAE2}"/>
               </a:ext>
             </a:extLst>
           </p:cNvPr>
@@ -3616,7 +3616,7 @@
           <p:cNvPr id="8" name="">
             <a:extLst xmlns:a="http://schemas.openxmlformats.org/drawingml/2006/main">
               <a:ext uri="{FF2B5EF4-FFF2-40B4-BE49-F238E27FC236}">
-                <a16:creationId xmlns:a16="http://schemas.microsoft.com/office/drawing/2014/main" id="{8B7B1260-528F-4B85-86C0-79E72E469C41}"/>
+                <a16:creationId xmlns:a16="http://schemas.microsoft.com/office/drawing/2014/main" id="{926DCB4A-4182-43C5-B9BA-10D5F953C182}"/>
               </a:ext>
             </a:extLst>
           </p:cNvPr>
@@ -3673,7 +3673,7 @@
           <p:cNvPr id="9" name="">
             <a:extLst xmlns:a="http://schemas.openxmlformats.org/drawingml/2006/main">
               <a:ext uri="{FF2B5EF4-FFF2-40B4-BE49-F238E27FC236}">
-                <a16:creationId xmlns:a16="http://schemas.microsoft.com/office/drawing/2014/main" id="{37C09FDC-468A-498D-908E-FED70CA025DE}"/>
+                <a16:creationId xmlns:a16="http://schemas.microsoft.com/office/drawing/2014/main" id="{35EB08E5-2868-4EF2-8A9F-8A56E9E900FF}"/>
               </a:ext>
             </a:extLst>
           </p:cNvPr>
@@ -3730,7 +3730,7 @@
           <p:cNvPr id="10" name="">
             <a:extLst xmlns:a="http://schemas.openxmlformats.org/drawingml/2006/main">
               <a:ext uri="{FF2B5EF4-FFF2-40B4-BE49-F238E27FC236}">
-                <a16:creationId xmlns:a16="http://schemas.microsoft.com/office/drawing/2014/main" id="{31EB8EA9-242F-41AD-A635-7609C10B222D}"/>
+                <a16:creationId xmlns:a16="http://schemas.microsoft.com/office/drawing/2014/main" id="{9B01BEC6-5786-43C3-B2D7-99F1A402FECD}"/>
               </a:ext>
             </a:extLst>
           </p:cNvPr>
@@ -3787,7 +3787,7 @@
           <p:cNvPr id="11" name="">
             <a:extLst xmlns:a="http://schemas.openxmlformats.org/drawingml/2006/main">
               <a:ext uri="{FF2B5EF4-FFF2-40B4-BE49-F238E27FC236}">
-                <a16:creationId xmlns:a16="http://schemas.microsoft.com/office/drawing/2014/main" id="{4B30836B-0397-4DE8-BCE7-B1217C131C98}"/>
+                <a16:creationId xmlns:a16="http://schemas.microsoft.com/office/drawing/2014/main" id="{3016E888-B19F-465B-BCC7-7C7CF8900221}"/>
               </a:ext>
             </a:extLst>
           </p:cNvPr>
@@ -3821,7 +3821,7 @@
           <p:cNvPr id="12" name="">
             <a:extLst xmlns:a="http://schemas.openxmlformats.org/drawingml/2006/main">
               <a:ext uri="{FF2B5EF4-FFF2-40B4-BE49-F238E27FC236}">
-                <a16:creationId xmlns:a16="http://schemas.microsoft.com/office/drawing/2014/main" id="{2238E4E0-4144-44A3-B0BD-25792FE983EF}"/>
+                <a16:creationId xmlns:a16="http://schemas.microsoft.com/office/drawing/2014/main" id="{65E1A963-C09F-440D-9579-D68A90857E12}"/>
               </a:ext>
             </a:extLst>
           </p:cNvPr>
@@ -3878,7 +3878,7 @@
           <p:cNvPr id="13" name="">
             <a:extLst xmlns:a="http://schemas.openxmlformats.org/drawingml/2006/main">
               <a:ext uri="{FF2B5EF4-FFF2-40B4-BE49-F238E27FC236}">
-                <a16:creationId xmlns:a16="http://schemas.microsoft.com/office/drawing/2014/main" id="{E650044E-77AE-43D1-A664-CB3FE6DEB25F}"/>
+                <a16:creationId xmlns:a16="http://schemas.microsoft.com/office/drawing/2014/main" id="{1630F54D-68CD-49F9-BFEA-8431601BA271}"/>
               </a:ext>
             </a:extLst>
           </p:cNvPr>
@@ -3935,7 +3935,7 @@
           <p:cNvPr id="14" name="">
             <a:extLst xmlns:a="http://schemas.openxmlformats.org/drawingml/2006/main">
               <a:ext uri="{FF2B5EF4-FFF2-40B4-BE49-F238E27FC236}">
-                <a16:creationId xmlns:a16="http://schemas.microsoft.com/office/drawing/2014/main" id="{38C18E03-92EE-447C-9D82-862787EB8632}"/>
+                <a16:creationId xmlns:a16="http://schemas.microsoft.com/office/drawing/2014/main" id="{8DF86C9B-C656-4C9B-9511-A2F0DDF5F519}"/>
               </a:ext>
             </a:extLst>
           </p:cNvPr>
@@ -3992,7 +3992,7 @@
           <p:cNvPr id="15" name="">
             <a:extLst xmlns:a="http://schemas.openxmlformats.org/drawingml/2006/main">
               <a:ext uri="{FF2B5EF4-FFF2-40B4-BE49-F238E27FC236}">
-                <a16:creationId xmlns:a16="http://schemas.microsoft.com/office/drawing/2014/main" id="{7738EEF9-728A-481B-A944-3C353510E474}"/>
+                <a16:creationId xmlns:a16="http://schemas.microsoft.com/office/drawing/2014/main" id="{D2B99817-4602-4612-8048-EF28BD07CD8B}"/>
               </a:ext>
             </a:extLst>
           </p:cNvPr>
@@ -4026,7 +4026,7 @@
           <p:cNvPr id="16" name="">
             <a:extLst xmlns:a="http://schemas.openxmlformats.org/drawingml/2006/main">
               <a:ext uri="{FF2B5EF4-FFF2-40B4-BE49-F238E27FC236}">
-                <a16:creationId xmlns:a16="http://schemas.microsoft.com/office/drawing/2014/main" id="{234A8E85-2204-4321-9059-33EDFEE6C887}"/>
+                <a16:creationId xmlns:a16="http://schemas.microsoft.com/office/drawing/2014/main" id="{CFD23B1A-B609-4CE7-94C7-E525D1C9D778}"/>
               </a:ext>
             </a:extLst>
           </p:cNvPr>
@@ -4083,7 +4083,7 @@
           <p:cNvPr id="17" name="">
             <a:extLst xmlns:a="http://schemas.openxmlformats.org/drawingml/2006/main">
               <a:ext uri="{FF2B5EF4-FFF2-40B4-BE49-F238E27FC236}">
-                <a16:creationId xmlns:a16="http://schemas.microsoft.com/office/drawing/2014/main" id="{8034F7B0-A0F0-43BF-8CE5-F54628C0D4D3}"/>
+                <a16:creationId xmlns:a16="http://schemas.microsoft.com/office/drawing/2014/main" id="{5828A106-A6CD-466B-AC42-6F7827BDEEC1}"/>
               </a:ext>
             </a:extLst>
           </p:cNvPr>
@@ -4140,7 +4140,7 @@
           <p:cNvPr id="18" name="">
             <a:extLst xmlns:a="http://schemas.openxmlformats.org/drawingml/2006/main">
               <a:ext uri="{FF2B5EF4-FFF2-40B4-BE49-F238E27FC236}">
-                <a16:creationId xmlns:a16="http://schemas.microsoft.com/office/drawing/2014/main" id="{51AF94C9-F814-4F1B-B400-38429590B3B3}"/>
+                <a16:creationId xmlns:a16="http://schemas.microsoft.com/office/drawing/2014/main" id="{A22513AD-0AC8-4121-8A2D-9005A2FDCB86}"/>
               </a:ext>
             </a:extLst>
           </p:cNvPr>
@@ -4195,7 +4195,7 @@
     </p:spTree>
     <p:extLst>
       <p:ext uri="{BB962C8B-B14F-4D97-AF65-F5344CB8AC3E}">
-        <p14:creationId xmlns:p14="http://schemas.microsoft.com/office/powerpoint/2010/main" val="627108854"/>
+        <p14:creationId xmlns:p14="http://schemas.microsoft.com/office/powerpoint/2010/main" val="207138219"/>
       </p:ext>
     </p:extLst>
   </p:cSld>
@@ -4350,7 +4350,7 @@
           <p:cNvPr id="23" name="">
             <a:extLst xmlns:a="http://schemas.openxmlformats.org/drawingml/2006/main">
               <a:ext uri="{FF2B5EF4-FFF2-40B4-BE49-F238E27FC236}">
-                <a16:creationId xmlns:a16="http://schemas.microsoft.com/office/drawing/2014/main" id="{E592836C-1B8C-401E-8656-750E972D2789}"/>
+                <a16:creationId xmlns:a16="http://schemas.microsoft.com/office/drawing/2014/main" id="{F1B2DC85-8485-4AE0-9D4F-0B5CE9B9E7BF}"/>
               </a:ext>
             </a:extLst>
           </p:cNvPr>
@@ -4382,7 +4382,7 @@
           <p:cNvPr id="2" name="">
             <a:extLst xmlns:a="http://schemas.openxmlformats.org/drawingml/2006/main">
               <a:ext uri="{FF2B5EF4-FFF2-40B4-BE49-F238E27FC236}">
-                <a16:creationId xmlns:a16="http://schemas.microsoft.com/office/drawing/2014/main" id="{CA7830C1-D4BD-4855-98E3-E319FC277554}"/>
+                <a16:creationId xmlns:a16="http://schemas.microsoft.com/office/drawing/2014/main" id="{846CA4CC-A3DB-4C4B-9C3D-6D76DC9923B9}"/>
               </a:ext>
             </a:extLst>
           </p:cNvPr>
@@ -4439,7 +4439,7 @@
           <p:cNvPr id="3" name="">
             <a:extLst xmlns:a="http://schemas.openxmlformats.org/drawingml/2006/main">
               <a:ext uri="{FF2B5EF4-FFF2-40B4-BE49-F238E27FC236}">
-                <a16:creationId xmlns:a16="http://schemas.microsoft.com/office/drawing/2014/main" id="{D47EA620-F388-45FE-8173-83E164A8FF61}"/>
+                <a16:creationId xmlns:a16="http://schemas.microsoft.com/office/drawing/2014/main" id="{458E1571-A761-4277-A4BC-18A7443E772E}"/>
               </a:ext>
             </a:extLst>
           </p:cNvPr>
@@ -4471,7 +4471,7 @@
           <p:cNvPr id="4" name="">
             <a:extLst xmlns:a="http://schemas.openxmlformats.org/drawingml/2006/main">
               <a:ext uri="{FF2B5EF4-FFF2-40B4-BE49-F238E27FC236}">
-                <a16:creationId xmlns:a16="http://schemas.microsoft.com/office/drawing/2014/main" id="{1CE00839-3D9D-4ED0-9AFB-C3DB6680C345}"/>
+                <a16:creationId xmlns:a16="http://schemas.microsoft.com/office/drawing/2014/main" id="{DDC87B38-9A1A-460F-BBB9-F69F1305697A}"/>
               </a:ext>
             </a:extLst>
           </p:cNvPr>
@@ -4528,7 +4528,7 @@
           <p:cNvPr id="5" name="">
             <a:extLst xmlns:a="http://schemas.openxmlformats.org/drawingml/2006/main">
               <a:ext uri="{FF2B5EF4-FFF2-40B4-BE49-F238E27FC236}">
-                <a16:creationId xmlns:a16="http://schemas.microsoft.com/office/drawing/2014/main" id="{E3C20851-629C-469A-A0BC-3C2EFE67B215}"/>
+                <a16:creationId xmlns:a16="http://schemas.microsoft.com/office/drawing/2014/main" id="{0F3B7265-6441-47A0-8EAB-6B52A16763C3}"/>
               </a:ext>
             </a:extLst>
           </p:cNvPr>
@@ -4585,7 +4585,7 @@
           <p:cNvPr id="6" name="">
             <a:extLst xmlns:a="http://schemas.openxmlformats.org/drawingml/2006/main">
               <a:ext uri="{FF2B5EF4-FFF2-40B4-BE49-F238E27FC236}">
-                <a16:creationId xmlns:a16="http://schemas.microsoft.com/office/drawing/2014/main" id="{A399D6CD-5DD7-4831-BE78-294F27689FE9}"/>
+                <a16:creationId xmlns:a16="http://schemas.microsoft.com/office/drawing/2014/main" id="{C4BEEE86-98DF-415F-9F91-C290F6D15367}"/>
               </a:ext>
             </a:extLst>
           </p:cNvPr>
@@ -4642,7 +4642,7 @@
           <p:cNvPr id="7" name="">
             <a:extLst xmlns:a="http://schemas.openxmlformats.org/drawingml/2006/main">
               <a:ext uri="{FF2B5EF4-FFF2-40B4-BE49-F238E27FC236}">
-                <a16:creationId xmlns:a16="http://schemas.microsoft.com/office/drawing/2014/main" id="{A36E27D0-0CDF-410B-B478-4E1278E5BF08}"/>
+                <a16:creationId xmlns:a16="http://schemas.microsoft.com/office/drawing/2014/main" id="{84177AA7-FD05-4AFE-BECD-71627D9878C6}"/>
               </a:ext>
             </a:extLst>
           </p:cNvPr>
@@ -4674,7 +4674,7 @@
           <p:cNvPr id="8" name="">
             <a:extLst xmlns:a="http://schemas.openxmlformats.org/drawingml/2006/main">
               <a:ext uri="{FF2B5EF4-FFF2-40B4-BE49-F238E27FC236}">
-                <a16:creationId xmlns:a16="http://schemas.microsoft.com/office/drawing/2014/main" id="{493361CD-B08D-4F7B-908A-D710BE59F585}"/>
+                <a16:creationId xmlns:a16="http://schemas.microsoft.com/office/drawing/2014/main" id="{374D2687-4175-4B45-9DB2-B7CE2DCC225C}"/>
               </a:ext>
             </a:extLst>
           </p:cNvPr>
@@ -4731,7 +4731,7 @@
           <p:cNvPr id="9" name="">
             <a:extLst xmlns:a="http://schemas.openxmlformats.org/drawingml/2006/main">
               <a:ext uri="{FF2B5EF4-FFF2-40B4-BE49-F238E27FC236}">
-                <a16:creationId xmlns:a16="http://schemas.microsoft.com/office/drawing/2014/main" id="{6FC4B1C7-1587-44F9-A1CC-9F89FB595DFB}"/>
+                <a16:creationId xmlns:a16="http://schemas.microsoft.com/office/drawing/2014/main" id="{0E85EA79-0AB7-4574-A242-DA707FF05483}"/>
               </a:ext>
             </a:extLst>
           </p:cNvPr>
@@ -4788,7 +4788,7 @@
           <p:cNvPr id="10" name="">
             <a:extLst xmlns:a="http://schemas.openxmlformats.org/drawingml/2006/main">
               <a:ext uri="{FF2B5EF4-FFF2-40B4-BE49-F238E27FC236}">
-                <a16:creationId xmlns:a16="http://schemas.microsoft.com/office/drawing/2014/main" id="{E733C1AD-5E11-46DB-94AF-1A5520D4FDC3}"/>
+                <a16:creationId xmlns:a16="http://schemas.microsoft.com/office/drawing/2014/main" id="{96979258-748E-4E9A-8458-92C9BC575B32}"/>
               </a:ext>
             </a:extLst>
           </p:cNvPr>
@@ -4822,7 +4822,7 @@
           <p:cNvPr id="11" name="">
             <a:extLst xmlns:a="http://schemas.openxmlformats.org/drawingml/2006/main">
               <a:ext uri="{FF2B5EF4-FFF2-40B4-BE49-F238E27FC236}">
-                <a16:creationId xmlns:a16="http://schemas.microsoft.com/office/drawing/2014/main" id="{C093D69E-B303-41FD-955C-66A365BDD6A8}"/>
+                <a16:creationId xmlns:a16="http://schemas.microsoft.com/office/drawing/2014/main" id="{77949D98-31F8-4094-BD08-59195278D8C5}"/>
               </a:ext>
             </a:extLst>
           </p:cNvPr>
@@ -4854,7 +4854,7 @@
           <p:cNvPr id="12" name="">
             <a:extLst xmlns:a="http://schemas.openxmlformats.org/drawingml/2006/main">
               <a:ext uri="{FF2B5EF4-FFF2-40B4-BE49-F238E27FC236}">
-                <a16:creationId xmlns:a16="http://schemas.microsoft.com/office/drawing/2014/main" id="{5DDF1DDB-542A-43AC-82E0-B5A7668262FD}"/>
+                <a16:creationId xmlns:a16="http://schemas.microsoft.com/office/drawing/2014/main" id="{094AED64-8B78-4D20-9BFF-8F1F747D0530}"/>
               </a:ext>
             </a:extLst>
           </p:cNvPr>
@@ -4911,7 +4911,7 @@
           <p:cNvPr id="13" name="">
             <a:extLst xmlns:a="http://schemas.openxmlformats.org/drawingml/2006/main">
               <a:ext uri="{FF2B5EF4-FFF2-40B4-BE49-F238E27FC236}">
-                <a16:creationId xmlns:a16="http://schemas.microsoft.com/office/drawing/2014/main" id="{FB24B2D1-0763-4E2F-A391-256A49070F24}"/>
+                <a16:creationId xmlns:a16="http://schemas.microsoft.com/office/drawing/2014/main" id="{58119A06-8294-409C-B8C6-7105D4B5A270}"/>
               </a:ext>
             </a:extLst>
           </p:cNvPr>
@@ -4968,7 +4968,7 @@
           <p:cNvPr id="14" name="">
             <a:extLst xmlns:a="http://schemas.openxmlformats.org/drawingml/2006/main">
               <a:ext uri="{FF2B5EF4-FFF2-40B4-BE49-F238E27FC236}">
-                <a16:creationId xmlns:a16="http://schemas.microsoft.com/office/drawing/2014/main" id="{06A38641-F5A9-40CE-9F4D-BE49572DF22C}"/>
+                <a16:creationId xmlns:a16="http://schemas.microsoft.com/office/drawing/2014/main" id="{490BB377-CD00-4485-80BE-ACD9442593A5}"/>
               </a:ext>
             </a:extLst>
           </p:cNvPr>
@@ -5002,7 +5002,7 @@
           <p:cNvPr id="15" name="">
             <a:extLst xmlns:a="http://schemas.openxmlformats.org/drawingml/2006/main">
               <a:ext uri="{FF2B5EF4-FFF2-40B4-BE49-F238E27FC236}">
-                <a16:creationId xmlns:a16="http://schemas.microsoft.com/office/drawing/2014/main" id="{D4F85E8B-D5FE-4F5D-B913-4A8A7FF33883}"/>
+                <a16:creationId xmlns:a16="http://schemas.microsoft.com/office/drawing/2014/main" id="{62521E9D-AB14-4D5C-A8C6-CCAC363DCB02}"/>
               </a:ext>
             </a:extLst>
           </p:cNvPr>
@@ -5034,7 +5034,7 @@
           <p:cNvPr id="16" name="">
             <a:extLst xmlns:a="http://schemas.openxmlformats.org/drawingml/2006/main">
               <a:ext uri="{FF2B5EF4-FFF2-40B4-BE49-F238E27FC236}">
-                <a16:creationId xmlns:a16="http://schemas.microsoft.com/office/drawing/2014/main" id="{E1B5B902-F0F7-4C27-8BF9-9A5B02EB9C90}"/>
+                <a16:creationId xmlns:a16="http://schemas.microsoft.com/office/drawing/2014/main" id="{3C32C113-6B22-4A86-AF6B-557AAE75799A}"/>
               </a:ext>
             </a:extLst>
           </p:cNvPr>
@@ -5091,7 +5091,7 @@
           <p:cNvPr id="17" name="">
             <a:extLst xmlns:a="http://schemas.openxmlformats.org/drawingml/2006/main">
               <a:ext uri="{FF2B5EF4-FFF2-40B4-BE49-F238E27FC236}">
-                <a16:creationId xmlns:a16="http://schemas.microsoft.com/office/drawing/2014/main" id="{24E8DF3C-BF2B-438D-AD31-5665AE7E318C}"/>
+                <a16:creationId xmlns:a16="http://schemas.microsoft.com/office/drawing/2014/main" id="{EB8B340F-B3E5-4325-BA97-B1F273CBB221}"/>
               </a:ext>
             </a:extLst>
           </p:cNvPr>
@@ -5148,7 +5148,7 @@
           <p:cNvPr id="18" name="">
             <a:extLst xmlns:a="http://schemas.openxmlformats.org/drawingml/2006/main">
               <a:ext uri="{FF2B5EF4-FFF2-40B4-BE49-F238E27FC236}">
-                <a16:creationId xmlns:a16="http://schemas.microsoft.com/office/drawing/2014/main" id="{714D4E5E-3E8B-4A28-A6A0-712ABD7F9DDB}"/>
+                <a16:creationId xmlns:a16="http://schemas.microsoft.com/office/drawing/2014/main" id="{4B137D63-308E-49A3-9416-EE1302D50E92}"/>
               </a:ext>
             </a:extLst>
           </p:cNvPr>
@@ -5182,7 +5182,7 @@
           <p:cNvPr id="19" name="">
             <a:extLst xmlns:a="http://schemas.openxmlformats.org/drawingml/2006/main">
               <a:ext uri="{FF2B5EF4-FFF2-40B4-BE49-F238E27FC236}">
-                <a16:creationId xmlns:a16="http://schemas.microsoft.com/office/drawing/2014/main" id="{7CB1AFB7-8425-44DC-9189-A47192EA92D0}"/>
+                <a16:creationId xmlns:a16="http://schemas.microsoft.com/office/drawing/2014/main" id="{A2D4E03A-1F54-4DAA-A3E8-1F4253646B00}"/>
               </a:ext>
             </a:extLst>
           </p:cNvPr>
@@ -5214,7 +5214,7 @@
           <p:cNvPr id="20" name="">
             <a:extLst xmlns:a="http://schemas.openxmlformats.org/drawingml/2006/main">
               <a:ext uri="{FF2B5EF4-FFF2-40B4-BE49-F238E27FC236}">
-                <a16:creationId xmlns:a16="http://schemas.microsoft.com/office/drawing/2014/main" id="{330F331F-2F81-4CC3-BBB2-1FE683593CE8}"/>
+                <a16:creationId xmlns:a16="http://schemas.microsoft.com/office/drawing/2014/main" id="{44D5B190-55A9-433D-AF1E-EF63F4A17850}"/>
               </a:ext>
             </a:extLst>
           </p:cNvPr>
@@ -5271,7 +5271,7 @@
           <p:cNvPr id="21" name="">
             <a:extLst xmlns:a="http://schemas.openxmlformats.org/drawingml/2006/main">
               <a:ext uri="{FF2B5EF4-FFF2-40B4-BE49-F238E27FC236}">
-                <a16:creationId xmlns:a16="http://schemas.microsoft.com/office/drawing/2014/main" id="{7DD3917A-3704-4B70-8E2E-661CE71C0FB1}"/>
+                <a16:creationId xmlns:a16="http://schemas.microsoft.com/office/drawing/2014/main" id="{7E8A8F37-9964-4B1C-A025-AE9BFA5ECE50}"/>
               </a:ext>
             </a:extLst>
           </p:cNvPr>
@@ -5328,7 +5328,7 @@
           <p:cNvPr id="22" name="">
             <a:extLst xmlns:a="http://schemas.openxmlformats.org/drawingml/2006/main">
               <a:ext uri="{FF2B5EF4-FFF2-40B4-BE49-F238E27FC236}">
-                <a16:creationId xmlns:a16="http://schemas.microsoft.com/office/drawing/2014/main" id="{C6CD8E2D-CCF3-4FF4-8094-BEFE3C385DC3}"/>
+                <a16:creationId xmlns:a16="http://schemas.microsoft.com/office/drawing/2014/main" id="{E89D70A5-9BB6-4544-9CE4-085983F0159A}"/>
               </a:ext>
             </a:extLst>
           </p:cNvPr>
@@ -5383,7 +5383,7 @@
     </p:spTree>
     <p:extLst>
       <p:ext uri="{BB962C8B-B14F-4D97-AF65-F5344CB8AC3E}">
-        <p14:creationId xmlns:p14="http://schemas.microsoft.com/office/powerpoint/2010/main" val="378931837"/>
+        <p14:creationId xmlns:p14="http://schemas.microsoft.com/office/powerpoint/2010/main" val="1905148599"/>
       </p:ext>
     </p:extLst>
   </p:cSld>
@@ -5584,7 +5584,7 @@
           <p:cNvPr id="23" name="">
             <a:extLst xmlns:a="http://schemas.openxmlformats.org/drawingml/2006/main">
               <a:ext uri="{FF2B5EF4-FFF2-40B4-BE49-F238E27FC236}">
-                <a16:creationId xmlns:a16="http://schemas.microsoft.com/office/drawing/2014/main" id="{4687CAE4-DB44-44C3-838F-179F18F0302F}"/>
+                <a16:creationId xmlns:a16="http://schemas.microsoft.com/office/drawing/2014/main" id="{123ED0F1-B63C-40B2-AD76-61DE19576BDB}"/>
               </a:ext>
             </a:extLst>
           </p:cNvPr>
@@ -5616,7 +5616,7 @@
           <p:cNvPr id="2" name="">
             <a:extLst xmlns:a="http://schemas.openxmlformats.org/drawingml/2006/main">
               <a:ext uri="{FF2B5EF4-FFF2-40B4-BE49-F238E27FC236}">
-                <a16:creationId xmlns:a16="http://schemas.microsoft.com/office/drawing/2014/main" id="{2FA7E5CB-A5A9-461C-8510-CDEF6C4A004C}"/>
+                <a16:creationId xmlns:a16="http://schemas.microsoft.com/office/drawing/2014/main" id="{94B7594C-917F-4CDB-B39A-0D2C1FF4D80B}"/>
               </a:ext>
             </a:extLst>
           </p:cNvPr>
@@ -5673,7 +5673,7 @@
           <p:cNvPr id="3" name="">
             <a:extLst xmlns:a="http://schemas.openxmlformats.org/drawingml/2006/main">
               <a:ext uri="{FF2B5EF4-FFF2-40B4-BE49-F238E27FC236}">
-                <a16:creationId xmlns:a16="http://schemas.microsoft.com/office/drawing/2014/main" id="{77BFED87-3467-4CD5-8272-62816EC9F39C}"/>
+                <a16:creationId xmlns:a16="http://schemas.microsoft.com/office/drawing/2014/main" id="{A495DECF-0E8C-411C-AA67-15A5AC88587E}"/>
               </a:ext>
             </a:extLst>
           </p:cNvPr>
@@ -5705,7 +5705,7 @@
           <p:cNvPr id="4" name="">
             <a:extLst xmlns:a="http://schemas.openxmlformats.org/drawingml/2006/main">
               <a:ext uri="{FF2B5EF4-FFF2-40B4-BE49-F238E27FC236}">
-                <a16:creationId xmlns:a16="http://schemas.microsoft.com/office/drawing/2014/main" id="{0BCA9821-B834-45BB-9008-ACAD7F5C9362}"/>
+                <a16:creationId xmlns:a16="http://schemas.microsoft.com/office/drawing/2014/main" id="{CE33E073-84E1-4405-B5A0-4847BF147FE6}"/>
               </a:ext>
             </a:extLst>
           </p:cNvPr>
@@ -5762,7 +5762,7 @@
           <p:cNvPr id="5" name="">
             <a:extLst xmlns:a="http://schemas.openxmlformats.org/drawingml/2006/main">
               <a:ext uri="{FF2B5EF4-FFF2-40B4-BE49-F238E27FC236}">
-                <a16:creationId xmlns:a16="http://schemas.microsoft.com/office/drawing/2014/main" id="{A778E31B-584F-4E31-A9B2-B4F2291FB0F9}"/>
+                <a16:creationId xmlns:a16="http://schemas.microsoft.com/office/drawing/2014/main" id="{D20CF73F-1F3C-47E7-A101-02A953DEF54C}"/>
               </a:ext>
             </a:extLst>
           </p:cNvPr>
@@ -5819,7 +5819,7 @@
           <p:cNvPr id="6" name="">
             <a:extLst xmlns:a="http://schemas.openxmlformats.org/drawingml/2006/main">
               <a:ext uri="{FF2B5EF4-FFF2-40B4-BE49-F238E27FC236}">
-                <a16:creationId xmlns:a16="http://schemas.microsoft.com/office/drawing/2014/main" id="{AD25BE51-A23E-4C2C-9D6C-24B42A2D9B13}"/>
+                <a16:creationId xmlns:a16="http://schemas.microsoft.com/office/drawing/2014/main" id="{1C9F0240-9951-4CE8-97E9-8251A811D96F}"/>
               </a:ext>
             </a:extLst>
           </p:cNvPr>
@@ -5876,7 +5876,7 @@
           <p:cNvPr id="7" name="">
             <a:extLst xmlns:a="http://schemas.openxmlformats.org/drawingml/2006/main">
               <a:ext uri="{FF2B5EF4-FFF2-40B4-BE49-F238E27FC236}">
-                <a16:creationId xmlns:a16="http://schemas.microsoft.com/office/drawing/2014/main" id="{FB43F730-1E30-4C48-9FC5-6FDE3730C32D}"/>
+                <a16:creationId xmlns:a16="http://schemas.microsoft.com/office/drawing/2014/main" id="{D8684387-E198-4F4C-B60B-3B5EE2EF25A5}"/>
               </a:ext>
             </a:extLst>
           </p:cNvPr>
@@ -5908,7 +5908,7 @@
           <p:cNvPr id="8" name="">
             <a:extLst xmlns:a="http://schemas.openxmlformats.org/drawingml/2006/main">
               <a:ext uri="{FF2B5EF4-FFF2-40B4-BE49-F238E27FC236}">
-                <a16:creationId xmlns:a16="http://schemas.microsoft.com/office/drawing/2014/main" id="{F4211F23-CFB4-48E3-945D-3E089F6DADEE}"/>
+                <a16:creationId xmlns:a16="http://schemas.microsoft.com/office/drawing/2014/main" id="{EBA93540-5A80-4122-9C56-0EE08F54FB5A}"/>
               </a:ext>
             </a:extLst>
           </p:cNvPr>
@@ -5965,7 +5965,7 @@
           <p:cNvPr id="9" name="">
             <a:extLst xmlns:a="http://schemas.openxmlformats.org/drawingml/2006/main">
               <a:ext uri="{FF2B5EF4-FFF2-40B4-BE49-F238E27FC236}">
-                <a16:creationId xmlns:a16="http://schemas.microsoft.com/office/drawing/2014/main" id="{1732947C-D475-4652-AB73-B4DB613E3F44}"/>
+                <a16:creationId xmlns:a16="http://schemas.microsoft.com/office/drawing/2014/main" id="{66EC6D07-B1EE-413D-98E1-8BAECAABD7BE}"/>
               </a:ext>
             </a:extLst>
           </p:cNvPr>
@@ -6022,7 +6022,7 @@
           <p:cNvPr id="10" name="">
             <a:extLst xmlns:a="http://schemas.openxmlformats.org/drawingml/2006/main">
               <a:ext uri="{FF2B5EF4-FFF2-40B4-BE49-F238E27FC236}">
-                <a16:creationId xmlns:a16="http://schemas.microsoft.com/office/drawing/2014/main" id="{E4E0E22E-121E-4F2B-9054-B5407F4A5A45}"/>
+                <a16:creationId xmlns:a16="http://schemas.microsoft.com/office/drawing/2014/main" id="{0BAF204D-541B-4CD6-998C-C247755FDD6E}"/>
               </a:ext>
             </a:extLst>
           </p:cNvPr>
@@ -6056,7 +6056,7 @@
           <p:cNvPr id="11" name="">
             <a:extLst xmlns:a="http://schemas.openxmlformats.org/drawingml/2006/main">
               <a:ext uri="{FF2B5EF4-FFF2-40B4-BE49-F238E27FC236}">
-                <a16:creationId xmlns:a16="http://schemas.microsoft.com/office/drawing/2014/main" id="{C665A843-32D0-4491-82E4-E48E2B376390}"/>
+                <a16:creationId xmlns:a16="http://schemas.microsoft.com/office/drawing/2014/main" id="{30BA408C-AC50-41F6-B732-8742F6D81735}"/>
               </a:ext>
             </a:extLst>
           </p:cNvPr>
@@ -6088,7 +6088,7 @@
           <p:cNvPr id="12" name="">
             <a:extLst xmlns:a="http://schemas.openxmlformats.org/drawingml/2006/main">
               <a:ext uri="{FF2B5EF4-FFF2-40B4-BE49-F238E27FC236}">
-                <a16:creationId xmlns:a16="http://schemas.microsoft.com/office/drawing/2014/main" id="{FD31FA50-80F4-418C-BE93-FBE002C9C7E6}"/>
+                <a16:creationId xmlns:a16="http://schemas.microsoft.com/office/drawing/2014/main" id="{778743C7-0B53-4861-97A4-17FDA3EB1FF7}"/>
               </a:ext>
             </a:extLst>
           </p:cNvPr>
@@ -6145,7 +6145,7 @@
           <p:cNvPr id="13" name="">
             <a:extLst xmlns:a="http://schemas.openxmlformats.org/drawingml/2006/main">
               <a:ext uri="{FF2B5EF4-FFF2-40B4-BE49-F238E27FC236}">
-                <a16:creationId xmlns:a16="http://schemas.microsoft.com/office/drawing/2014/main" id="{27035148-7AEF-4839-923A-4C8FF8EACFF5}"/>
+                <a16:creationId xmlns:a16="http://schemas.microsoft.com/office/drawing/2014/main" id="{83FB3FE7-5A86-4F84-9FC6-EA4F07285F59}"/>
               </a:ext>
             </a:extLst>
           </p:cNvPr>
@@ -6202,7 +6202,7 @@
           <p:cNvPr id="14" name="">
             <a:extLst xmlns:a="http://schemas.openxmlformats.org/drawingml/2006/main">
               <a:ext uri="{FF2B5EF4-FFF2-40B4-BE49-F238E27FC236}">
-                <a16:creationId xmlns:a16="http://schemas.microsoft.com/office/drawing/2014/main" id="{A2C66F85-17EE-4BA2-A9DA-D4DA80032079}"/>
+                <a16:creationId xmlns:a16="http://schemas.microsoft.com/office/drawing/2014/main" id="{27A85408-7692-4469-9523-C87A88862CB2}"/>
               </a:ext>
             </a:extLst>
           </p:cNvPr>
@@ -6236,7 +6236,7 @@
           <p:cNvPr id="15" name="">
             <a:extLst xmlns:a="http://schemas.openxmlformats.org/drawingml/2006/main">
               <a:ext uri="{FF2B5EF4-FFF2-40B4-BE49-F238E27FC236}">
-                <a16:creationId xmlns:a16="http://schemas.microsoft.com/office/drawing/2014/main" id="{C1B71272-A3FE-4B31-8603-A075E16E1134}"/>
+                <a16:creationId xmlns:a16="http://schemas.microsoft.com/office/drawing/2014/main" id="{A1DE384D-0C3D-41D0-B245-53F89451B5A8}"/>
               </a:ext>
             </a:extLst>
           </p:cNvPr>
@@ -6268,7 +6268,7 @@
           <p:cNvPr id="16" name="">
             <a:extLst xmlns:a="http://schemas.openxmlformats.org/drawingml/2006/main">
               <a:ext uri="{FF2B5EF4-FFF2-40B4-BE49-F238E27FC236}">
-                <a16:creationId xmlns:a16="http://schemas.microsoft.com/office/drawing/2014/main" id="{CBBF5B20-B4BA-48CE-A9C2-E254040BB619}"/>
+                <a16:creationId xmlns:a16="http://schemas.microsoft.com/office/drawing/2014/main" id="{51048795-96AD-4E3A-AAC8-C325391A2600}"/>
               </a:ext>
             </a:extLst>
           </p:cNvPr>
@@ -6325,7 +6325,7 @@
           <p:cNvPr id="17" name="">
             <a:extLst xmlns:a="http://schemas.openxmlformats.org/drawingml/2006/main">
               <a:ext uri="{FF2B5EF4-FFF2-40B4-BE49-F238E27FC236}">
-                <a16:creationId xmlns:a16="http://schemas.microsoft.com/office/drawing/2014/main" id="{6C6745F4-0997-4BD5-83DD-E88A3305F336}"/>
+                <a16:creationId xmlns:a16="http://schemas.microsoft.com/office/drawing/2014/main" id="{691A95EF-24E8-4DAC-94BA-BCE35162D883}"/>
               </a:ext>
             </a:extLst>
           </p:cNvPr>
@@ -6382,7 +6382,7 @@
           <p:cNvPr id="18" name="">
             <a:extLst xmlns:a="http://schemas.openxmlformats.org/drawingml/2006/main">
               <a:ext uri="{FF2B5EF4-FFF2-40B4-BE49-F238E27FC236}">
-                <a16:creationId xmlns:a16="http://schemas.microsoft.com/office/drawing/2014/main" id="{7B53B99C-1153-4992-9527-E1785EB6C08E}"/>
+                <a16:creationId xmlns:a16="http://schemas.microsoft.com/office/drawing/2014/main" id="{112F8FBE-229D-4FB5-B5BB-DDE5E797DF6D}"/>
               </a:ext>
             </a:extLst>
           </p:cNvPr>
@@ -6416,7 +6416,7 @@
           <p:cNvPr id="19" name="">
             <a:extLst xmlns:a="http://schemas.openxmlformats.org/drawingml/2006/main">
               <a:ext uri="{FF2B5EF4-FFF2-40B4-BE49-F238E27FC236}">
-                <a16:creationId xmlns:a16="http://schemas.microsoft.com/office/drawing/2014/main" id="{1C8015FB-83A4-4E99-9717-4886BAEDAD24}"/>
+                <a16:creationId xmlns:a16="http://schemas.microsoft.com/office/drawing/2014/main" id="{926FA91E-F586-4421-8002-E90C49A7CD15}"/>
               </a:ext>
             </a:extLst>
           </p:cNvPr>
@@ -6448,7 +6448,7 @@
           <p:cNvPr id="20" name="">
             <a:extLst xmlns:a="http://schemas.openxmlformats.org/drawingml/2006/main">
               <a:ext uri="{FF2B5EF4-FFF2-40B4-BE49-F238E27FC236}">
-                <a16:creationId xmlns:a16="http://schemas.microsoft.com/office/drawing/2014/main" id="{9F8E032B-7C1E-4B21-B954-D875B0DF0A5B}"/>
+                <a16:creationId xmlns:a16="http://schemas.microsoft.com/office/drawing/2014/main" id="{62B8EF53-708B-4AC2-91AD-A1CCA6577AE6}"/>
               </a:ext>
             </a:extLst>
           </p:cNvPr>
@@ -6505,7 +6505,7 @@
           <p:cNvPr id="21" name="">
             <a:extLst xmlns:a="http://schemas.openxmlformats.org/drawingml/2006/main">
               <a:ext uri="{FF2B5EF4-FFF2-40B4-BE49-F238E27FC236}">
-                <a16:creationId xmlns:a16="http://schemas.microsoft.com/office/drawing/2014/main" id="{74BB2B6E-118E-41B6-869A-2CEB76693D23}"/>
+                <a16:creationId xmlns:a16="http://schemas.microsoft.com/office/drawing/2014/main" id="{36996F8E-DB2D-4DBF-BAFB-180B0DF324FA}"/>
               </a:ext>
             </a:extLst>
           </p:cNvPr>
@@ -6562,7 +6562,7 @@
           <p:cNvPr id="22" name="">
             <a:extLst xmlns:a="http://schemas.openxmlformats.org/drawingml/2006/main">
               <a:ext uri="{FF2B5EF4-FFF2-40B4-BE49-F238E27FC236}">
-                <a16:creationId xmlns:a16="http://schemas.microsoft.com/office/drawing/2014/main" id="{3B934663-362D-4563-ADD9-66938B85C443}"/>
+                <a16:creationId xmlns:a16="http://schemas.microsoft.com/office/drawing/2014/main" id="{712C1D69-53DF-4432-9364-550A9B0EC850}"/>
               </a:ext>
             </a:extLst>
           </p:cNvPr>
@@ -6617,7 +6617,7 @@
     </p:spTree>
     <p:extLst>
       <p:ext uri="{BB962C8B-B14F-4D97-AF65-F5344CB8AC3E}">
-        <p14:creationId xmlns:p14="http://schemas.microsoft.com/office/powerpoint/2010/main" val="1003098329"/>
+        <p14:creationId xmlns:p14="http://schemas.microsoft.com/office/powerpoint/2010/main" val="864521018"/>
       </p:ext>
     </p:extLst>
   </p:cSld>
@@ -6818,7 +6818,7 @@
           <p:cNvPr id="16" name="">
             <a:extLst xmlns:a="http://schemas.openxmlformats.org/drawingml/2006/main">
               <a:ext uri="{FF2B5EF4-FFF2-40B4-BE49-F238E27FC236}">
-                <a16:creationId xmlns:a16="http://schemas.microsoft.com/office/drawing/2014/main" id="{F36B06B7-D8C8-4C6C-BA16-818E8ADB6170}"/>
+                <a16:creationId xmlns:a16="http://schemas.microsoft.com/office/drawing/2014/main" id="{84801869-F528-4DDB-960B-4620251DCD2A}"/>
               </a:ext>
             </a:extLst>
           </p:cNvPr>
@@ -6850,7 +6850,7 @@
           <p:cNvPr id="2" name="">
             <a:extLst xmlns:a="http://schemas.openxmlformats.org/drawingml/2006/main">
               <a:ext uri="{FF2B5EF4-FFF2-40B4-BE49-F238E27FC236}">
-                <a16:creationId xmlns:a16="http://schemas.microsoft.com/office/drawing/2014/main" id="{CFBA83C1-F546-4D40-9066-B9B7FFA53161}"/>
+                <a16:creationId xmlns:a16="http://schemas.microsoft.com/office/drawing/2014/main" id="{77D1CC0A-54D8-4B4C-AEC4-BD9A495029C4}"/>
               </a:ext>
             </a:extLst>
           </p:cNvPr>
@@ -6907,7 +6907,7 @@
           <p:cNvPr id="3" name="">
             <a:extLst xmlns:a="http://schemas.openxmlformats.org/drawingml/2006/main">
               <a:ext uri="{FF2B5EF4-FFF2-40B4-BE49-F238E27FC236}">
-                <a16:creationId xmlns:a16="http://schemas.microsoft.com/office/drawing/2014/main" id="{65C3B90E-8792-412F-A286-614B4F5C98E0}"/>
+                <a16:creationId xmlns:a16="http://schemas.microsoft.com/office/drawing/2014/main" id="{A2856212-EBF6-4D1E-AF28-15C0F32583F5}"/>
               </a:ext>
             </a:extLst>
           </p:cNvPr>
@@ -6939,7 +6939,7 @@
           <p:cNvPr id="4" name="">
             <a:extLst xmlns:a="http://schemas.openxmlformats.org/drawingml/2006/main">
               <a:ext uri="{FF2B5EF4-FFF2-40B4-BE49-F238E27FC236}">
-                <a16:creationId xmlns:a16="http://schemas.microsoft.com/office/drawing/2014/main" id="{A8742C21-D44E-4E58-A829-852C84785B0C}"/>
+                <a16:creationId xmlns:a16="http://schemas.microsoft.com/office/drawing/2014/main" id="{3D522A89-729A-40E8-A503-91FC1057959E}"/>
               </a:ext>
             </a:extLst>
           </p:cNvPr>
@@ -6996,7 +6996,7 @@
           <p:cNvPr id="5" name="">
             <a:extLst xmlns:a="http://schemas.openxmlformats.org/drawingml/2006/main">
               <a:ext uri="{FF2B5EF4-FFF2-40B4-BE49-F238E27FC236}">
-                <a16:creationId xmlns:a16="http://schemas.microsoft.com/office/drawing/2014/main" id="{F4068246-4EC1-4C91-AC7A-2EB27890704D}"/>
+                <a16:creationId xmlns:a16="http://schemas.microsoft.com/office/drawing/2014/main" id="{40E0BA9F-BD62-46B5-82B3-7E00C9B6B638}"/>
               </a:ext>
             </a:extLst>
           </p:cNvPr>
@@ -7053,7 +7053,7 @@
           <p:cNvPr id="6" name="">
             <a:extLst xmlns:a="http://schemas.openxmlformats.org/drawingml/2006/main">
               <a:ext uri="{FF2B5EF4-FFF2-40B4-BE49-F238E27FC236}">
-                <a16:creationId xmlns:a16="http://schemas.microsoft.com/office/drawing/2014/main" id="{48D5BDF1-BBFF-4D6F-9DAB-A2818BB9571D}"/>
+                <a16:creationId xmlns:a16="http://schemas.microsoft.com/office/drawing/2014/main" id="{4AC4CB52-F21B-4861-8DB0-C72B066E7FE4}"/>
               </a:ext>
             </a:extLst>
           </p:cNvPr>
@@ -7110,7 +7110,7 @@
           <p:cNvPr id="7" name="">
             <a:extLst xmlns:a="http://schemas.openxmlformats.org/drawingml/2006/main">
               <a:ext uri="{FF2B5EF4-FFF2-40B4-BE49-F238E27FC236}">
-                <a16:creationId xmlns:a16="http://schemas.microsoft.com/office/drawing/2014/main" id="{845EE5A9-BD95-42A3-845D-2541A44AD430}"/>
+                <a16:creationId xmlns:a16="http://schemas.microsoft.com/office/drawing/2014/main" id="{69F392CA-EB3F-4733-AAF7-CAD24A164292}"/>
               </a:ext>
             </a:extLst>
           </p:cNvPr>
@@ -7142,7 +7142,7 @@
           <p:cNvPr id="8" name="">
             <a:extLst xmlns:a="http://schemas.openxmlformats.org/drawingml/2006/main">
               <a:ext uri="{FF2B5EF4-FFF2-40B4-BE49-F238E27FC236}">
-                <a16:creationId xmlns:a16="http://schemas.microsoft.com/office/drawing/2014/main" id="{C9CAD190-4596-4077-9991-92C945659284}"/>
+                <a16:creationId xmlns:a16="http://schemas.microsoft.com/office/drawing/2014/main" id="{3B1D38AE-6C6D-4EBF-8CC0-A34E9CBE8B17}"/>
               </a:ext>
             </a:extLst>
           </p:cNvPr>
@@ -7199,7 +7199,7 @@
           <p:cNvPr id="9" name="">
             <a:extLst xmlns:a="http://schemas.openxmlformats.org/drawingml/2006/main">
               <a:ext uri="{FF2B5EF4-FFF2-40B4-BE49-F238E27FC236}">
-                <a16:creationId xmlns:a16="http://schemas.microsoft.com/office/drawing/2014/main" id="{2A74C262-8F47-41F4-9E65-18842FE1D1FE}"/>
+                <a16:creationId xmlns:a16="http://schemas.microsoft.com/office/drawing/2014/main" id="{4E8522DD-80A9-496B-A211-F59111F91BF7}"/>
               </a:ext>
             </a:extLst>
           </p:cNvPr>
@@ -7256,7 +7256,7 @@
           <p:cNvPr id="10" name="">
             <a:extLst xmlns:a="http://schemas.openxmlformats.org/drawingml/2006/main">
               <a:ext uri="{FF2B5EF4-FFF2-40B4-BE49-F238E27FC236}">
-                <a16:creationId xmlns:a16="http://schemas.microsoft.com/office/drawing/2014/main" id="{9EF8EC01-7D7D-4568-81C6-46FA70EB8953}"/>
+                <a16:creationId xmlns:a16="http://schemas.microsoft.com/office/drawing/2014/main" id="{FB24F0C5-1864-4A6E-8FD0-AE4AC10ED05B}"/>
               </a:ext>
             </a:extLst>
           </p:cNvPr>
@@ -7313,7 +7313,7 @@
           <p:cNvPr id="11" name="">
             <a:extLst xmlns:a="http://schemas.openxmlformats.org/drawingml/2006/main">
               <a:ext uri="{FF2B5EF4-FFF2-40B4-BE49-F238E27FC236}">
-                <a16:creationId xmlns:a16="http://schemas.microsoft.com/office/drawing/2014/main" id="{835A980D-FBD3-458C-A0A4-12EFBCF8AFE8}"/>
+                <a16:creationId xmlns:a16="http://schemas.microsoft.com/office/drawing/2014/main" id="{23AF10C8-4A5F-4CB8-80CE-6A5B3126C39B}"/>
               </a:ext>
             </a:extLst>
           </p:cNvPr>
@@ -7345,7 +7345,7 @@
           <p:cNvPr id="12" name="">
             <a:extLst xmlns:a="http://schemas.openxmlformats.org/drawingml/2006/main">
               <a:ext uri="{FF2B5EF4-FFF2-40B4-BE49-F238E27FC236}">
-                <a16:creationId xmlns:a16="http://schemas.microsoft.com/office/drawing/2014/main" id="{693717D0-FC99-46B9-AC71-537441596872}"/>
+                <a16:creationId xmlns:a16="http://schemas.microsoft.com/office/drawing/2014/main" id="{FF63E70F-ED3E-4F4F-85AF-694A3A7DA46E}"/>
               </a:ext>
             </a:extLst>
           </p:cNvPr>
@@ -7402,7 +7402,7 @@
           <p:cNvPr id="13" name="">
             <a:extLst xmlns:a="http://schemas.openxmlformats.org/drawingml/2006/main">
               <a:ext uri="{FF2B5EF4-FFF2-40B4-BE49-F238E27FC236}">
-                <a16:creationId xmlns:a16="http://schemas.microsoft.com/office/drawing/2014/main" id="{08CE956D-6B37-4B1C-836A-B0211DF45A3C}"/>
+                <a16:creationId xmlns:a16="http://schemas.microsoft.com/office/drawing/2014/main" id="{7BE285B3-8143-4F39-8ECD-97564A0A316F}"/>
               </a:ext>
             </a:extLst>
           </p:cNvPr>
@@ -7459,7 +7459,7 @@
           <p:cNvPr id="14" name="">
             <a:extLst xmlns:a="http://schemas.openxmlformats.org/drawingml/2006/main">
               <a:ext uri="{FF2B5EF4-FFF2-40B4-BE49-F238E27FC236}">
-                <a16:creationId xmlns:a16="http://schemas.microsoft.com/office/drawing/2014/main" id="{773FEA3C-82D4-4CE8-8962-15C737D7CFA3}"/>
+                <a16:creationId xmlns:a16="http://schemas.microsoft.com/office/drawing/2014/main" id="{6AFABAC9-175C-48F5-81EA-112399ECFFAA}"/>
               </a:ext>
             </a:extLst>
           </p:cNvPr>
@@ -7516,7 +7516,7 @@
           <p:cNvPr id="15" name="">
             <a:extLst xmlns:a="http://schemas.openxmlformats.org/drawingml/2006/main">
               <a:ext uri="{FF2B5EF4-FFF2-40B4-BE49-F238E27FC236}">
-                <a16:creationId xmlns:a16="http://schemas.microsoft.com/office/drawing/2014/main" id="{D6506BBD-4566-4EBA-A827-DF26506AC051}"/>
+                <a16:creationId xmlns:a16="http://schemas.microsoft.com/office/drawing/2014/main" id="{C9C903C3-0009-4989-B838-EABA3F4DB709}"/>
               </a:ext>
             </a:extLst>
           </p:cNvPr>
@@ -7571,7 +7571,7 @@
     </p:spTree>
     <p:extLst>
       <p:ext uri="{BB962C8B-B14F-4D97-AF65-F5344CB8AC3E}">
-        <p14:creationId xmlns:p14="http://schemas.microsoft.com/office/powerpoint/2010/main" val="1382926709"/>
+        <p14:creationId xmlns:p14="http://schemas.microsoft.com/office/powerpoint/2010/main" val="1274799843"/>
       </p:ext>
     </p:extLst>
   </p:cSld>
@@ -7772,7 +7772,7 @@
           <p:cNvPr id="23" name="">
             <a:extLst xmlns:a="http://schemas.openxmlformats.org/drawingml/2006/main">
               <a:ext uri="{FF2B5EF4-FFF2-40B4-BE49-F238E27FC236}">
-                <a16:creationId xmlns:a16="http://schemas.microsoft.com/office/drawing/2014/main" id="{3E04D715-35B8-4711-B381-E8139211B142}"/>
+                <a16:creationId xmlns:a16="http://schemas.microsoft.com/office/drawing/2014/main" id="{7704CFF9-1442-4977-A2BF-9EFDEF07025B}"/>
               </a:ext>
             </a:extLst>
           </p:cNvPr>
@@ -7804,7 +7804,7 @@
           <p:cNvPr id="2" name="">
             <a:extLst xmlns:a="http://schemas.openxmlformats.org/drawingml/2006/main">
               <a:ext uri="{FF2B5EF4-FFF2-40B4-BE49-F238E27FC236}">
-                <a16:creationId xmlns:a16="http://schemas.microsoft.com/office/drawing/2014/main" id="{BEAD40D6-EC25-41B6-943C-2863A7883AEE}"/>
+                <a16:creationId xmlns:a16="http://schemas.microsoft.com/office/drawing/2014/main" id="{8AC40AB0-A8F3-40DB-9881-1C6EE7FE24B5}"/>
               </a:ext>
             </a:extLst>
           </p:cNvPr>
@@ -7861,7 +7861,7 @@
           <p:cNvPr id="3" name="">
             <a:extLst xmlns:a="http://schemas.openxmlformats.org/drawingml/2006/main">
               <a:ext uri="{FF2B5EF4-FFF2-40B4-BE49-F238E27FC236}">
-                <a16:creationId xmlns:a16="http://schemas.microsoft.com/office/drawing/2014/main" id="{79CA6C02-3C99-4CEB-BF34-E082BC4851AD}"/>
+                <a16:creationId xmlns:a16="http://schemas.microsoft.com/office/drawing/2014/main" id="{1780F72A-DD8F-465E-9318-77071EB9F100}"/>
               </a:ext>
             </a:extLst>
           </p:cNvPr>
@@ -7893,7 +7893,7 @@
           <p:cNvPr id="4" name="">
             <a:extLst xmlns:a="http://schemas.openxmlformats.org/drawingml/2006/main">
               <a:ext uri="{FF2B5EF4-FFF2-40B4-BE49-F238E27FC236}">
-                <a16:creationId xmlns:a16="http://schemas.microsoft.com/office/drawing/2014/main" id="{3DC51E26-187D-4BDF-9E2B-762BBDD177FD}"/>
+                <a16:creationId xmlns:a16="http://schemas.microsoft.com/office/drawing/2014/main" id="{849A7718-7C65-4E0E-96F3-E3FE10473F5C}"/>
               </a:ext>
             </a:extLst>
           </p:cNvPr>
@@ -7950,7 +7950,7 @@
           <p:cNvPr id="5" name="">
             <a:extLst xmlns:a="http://schemas.openxmlformats.org/drawingml/2006/main">
               <a:ext uri="{FF2B5EF4-FFF2-40B4-BE49-F238E27FC236}">
-                <a16:creationId xmlns:a16="http://schemas.microsoft.com/office/drawing/2014/main" id="{FDB59392-4D1D-4FCC-ADD2-EC4D31EB3B36}"/>
+                <a16:creationId xmlns:a16="http://schemas.microsoft.com/office/drawing/2014/main" id="{B554FB9A-5352-424C-81E6-701376858F99}"/>
               </a:ext>
             </a:extLst>
           </p:cNvPr>
@@ -8007,7 +8007,7 @@
           <p:cNvPr id="6" name="">
             <a:extLst xmlns:a="http://schemas.openxmlformats.org/drawingml/2006/main">
               <a:ext uri="{FF2B5EF4-FFF2-40B4-BE49-F238E27FC236}">
-                <a16:creationId xmlns:a16="http://schemas.microsoft.com/office/drawing/2014/main" id="{3060F90F-FD7F-4E91-81FE-8C6F48143BF4}"/>
+                <a16:creationId xmlns:a16="http://schemas.microsoft.com/office/drawing/2014/main" id="{9B2AF275-D101-4954-A47F-3AE1FB15D1A4}"/>
               </a:ext>
             </a:extLst>
           </p:cNvPr>
@@ -8064,7 +8064,7 @@
           <p:cNvPr id="7" name="">
             <a:extLst xmlns:a="http://schemas.openxmlformats.org/drawingml/2006/main">
               <a:ext uri="{FF2B5EF4-FFF2-40B4-BE49-F238E27FC236}">
-                <a16:creationId xmlns:a16="http://schemas.microsoft.com/office/drawing/2014/main" id="{AE3E9074-620C-402F-9ADC-56E3665A703C}"/>
+                <a16:creationId xmlns:a16="http://schemas.microsoft.com/office/drawing/2014/main" id="{2237367A-CD5F-497D-BEA0-3ECC51DBC572}"/>
               </a:ext>
             </a:extLst>
           </p:cNvPr>
@@ -8096,7 +8096,7 @@
           <p:cNvPr id="8" name="">
             <a:extLst xmlns:a="http://schemas.openxmlformats.org/drawingml/2006/main">
               <a:ext uri="{FF2B5EF4-FFF2-40B4-BE49-F238E27FC236}">
-                <a16:creationId xmlns:a16="http://schemas.microsoft.com/office/drawing/2014/main" id="{B349730D-C020-4BFA-82BF-BD7215DA4C25}"/>
+                <a16:creationId xmlns:a16="http://schemas.microsoft.com/office/drawing/2014/main" id="{1954B002-211A-49DF-9BEA-4A12859B83A2}"/>
               </a:ext>
             </a:extLst>
           </p:cNvPr>
@@ -8153,7 +8153,7 @@
           <p:cNvPr id="9" name="">
             <a:extLst xmlns:a="http://schemas.openxmlformats.org/drawingml/2006/main">
               <a:ext uri="{FF2B5EF4-FFF2-40B4-BE49-F238E27FC236}">
-                <a16:creationId xmlns:a16="http://schemas.microsoft.com/office/drawing/2014/main" id="{B1A27E38-8609-4744-8C56-29BCC0128B12}"/>
+                <a16:creationId xmlns:a16="http://schemas.microsoft.com/office/drawing/2014/main" id="{5EEBB6D0-A6BB-4D74-88B7-E75D23719E3C}"/>
               </a:ext>
             </a:extLst>
           </p:cNvPr>
@@ -8210,19 +8210,19 @@
           <p:cNvPr id="10" name="">
             <a:extLst xmlns:a="http://schemas.openxmlformats.org/drawingml/2006/main">
               <a:ext uri="{FF2B5EF4-FFF2-40B4-BE49-F238E27FC236}">
-                <a16:creationId xmlns:a16="http://schemas.microsoft.com/office/drawing/2014/main" id="{E9941107-9F9C-4F08-AAE9-CDE30072CBB1}"/>
-              </a:ext>
-            </a:extLst>
-          </p:cNvPr>
-          <p:cNvSpPr>
-            <a:spLocks xmlns:a="http://schemas.openxmlformats.org/drawingml/2006/main" noGrp="1"/>
-          </p:cNvSpPr>
-          <p:nvPr/>
-        </p:nvSpPr>
-        <p:spPr>
-          <a:xfrm xmlns:a="http://schemas.openxmlformats.org/drawingml/2006/main">
-            <a:off x="914400" y="1257300"/>
-            <a:ext cx="10363200" cy="781050"/>
+                <a16:creationId xmlns:a16="http://schemas.microsoft.com/office/drawing/2014/main" id="{E52C5D18-A8C3-401A-8C46-DA38B39BDEEA}"/>
+              </a:ext>
+            </a:extLst>
+          </p:cNvPr>
+          <p:cNvSpPr>
+            <a:spLocks xmlns:a="http://schemas.openxmlformats.org/drawingml/2006/main" noGrp="1"/>
+          </p:cNvSpPr>
+          <p:nvPr/>
+        </p:nvSpPr>
+        <p:spPr>
+          <a:xfrm xmlns:a="http://schemas.openxmlformats.org/drawingml/2006/main">
+            <a:off x="857250" y="1219200"/>
+            <a:ext cx="10477500" cy="742950"/>
           </a:xfrm>
           <a:prstGeom xmlns:a="http://schemas.openxmlformats.org/drawingml/2006/main" prst="rect">
             <a:avLst/>
@@ -8239,7 +8239,7 @@
           <a:lstStyle xmlns:a="http://schemas.openxmlformats.org/drawingml/2006/main"/>
           <a:p xmlns:a="http://schemas.openxmlformats.org/drawingml/2006/main">
             <a:pPr algn="ctr">
-              <a:defRPr sz="2175" b="1">
+              <a:defRPr sz="2100" b="1">
                 <a:solidFill>
                   <a:srgbClr val="17253A"/>
                 </a:solidFill>
@@ -8249,7 +8249,7 @@
               </a:defRPr>
             </a:pPr>
             <a:r>
-              <a:rPr sz="2175" b="1">
+              <a:rPr sz="2100" b="1">
                 <a:solidFill>
                   <a:srgbClr val="17253A"/>
                 </a:solidFill>
@@ -8267,28 +8267,30 @@
           <p:cNvPr id="11" name="">
             <a:extLst xmlns:a="http://schemas.openxmlformats.org/drawingml/2006/main">
               <a:ext uri="{FF2B5EF4-FFF2-40B4-BE49-F238E27FC236}">
-                <a16:creationId xmlns:a16="http://schemas.microsoft.com/office/drawing/2014/main" id="{803F5B9F-87A6-4A70-B82E-041A79F2B498}"/>
-              </a:ext>
-            </a:extLst>
-          </p:cNvPr>
-          <p:cNvSpPr>
-            <a:spLocks xmlns:a="http://schemas.openxmlformats.org/drawingml/2006/main" noGrp="1"/>
-          </p:cNvSpPr>
-          <p:nvPr/>
-        </p:nvSpPr>
-        <p:spPr>
-          <a:xfrm xmlns:a="http://schemas.openxmlformats.org/drawingml/2006/main">
-            <a:off x="1000125" y="2247900"/>
-            <a:ext cx="476250" cy="476250"/>
-          </a:xfrm>
-          <a:prstGeom xmlns:a="http://schemas.openxmlformats.org/drawingml/2006/main" prst="ellipse">
+                <a16:creationId xmlns:a16="http://schemas.microsoft.com/office/drawing/2014/main" id="{C6D85580-DDF0-48E5-9586-2A14E1EDF3AA}"/>
+              </a:ext>
+            </a:extLst>
+          </p:cNvPr>
+          <p:cNvSpPr>
+            <a:spLocks xmlns:a="http://schemas.openxmlformats.org/drawingml/2006/main" noGrp="1"/>
+          </p:cNvSpPr>
+          <p:nvPr/>
+        </p:nvSpPr>
+        <p:spPr>
+          <a:xfrm xmlns:a="http://schemas.openxmlformats.org/drawingml/2006/main">
+            <a:off x="971550" y="2124075"/>
+            <a:ext cx="38100" cy="3524250"/>
+          </a:xfrm>
+          <a:prstGeom xmlns:a="http://schemas.openxmlformats.org/drawingml/2006/main" prst="rect">
             <a:avLst/>
           </a:prstGeom>
           <a:solidFill xmlns:a="http://schemas.openxmlformats.org/drawingml/2006/main">
-            <a:srgbClr val="18324A"/>
+            <a:srgbClr val="2C6E73"/>
           </a:solidFill>
           <a:ln xmlns:a="http://schemas.openxmlformats.org/drawingml/2006/main" w="0">
-            <a:noFill/>
+            <a:solidFill>
+              <a:srgbClr val="2C6E73"/>
+            </a:solidFill>
           </a:ln>
         </p:spPr>
       </p:sp>
@@ -8297,19 +8299,19 @@
           <p:cNvPr id="12" name="">
             <a:extLst xmlns:a="http://schemas.openxmlformats.org/drawingml/2006/main">
               <a:ext uri="{FF2B5EF4-FFF2-40B4-BE49-F238E27FC236}">
-                <a16:creationId xmlns:a16="http://schemas.microsoft.com/office/drawing/2014/main" id="{61AAD5CF-8D01-4D96-B81D-C02BD015EBAE}"/>
-              </a:ext>
-            </a:extLst>
-          </p:cNvPr>
-          <p:cNvSpPr>
-            <a:spLocks xmlns:a="http://schemas.openxmlformats.org/drawingml/2006/main" noGrp="1"/>
-          </p:cNvSpPr>
-          <p:nvPr/>
-        </p:nvSpPr>
-        <p:spPr>
-          <a:xfrm xmlns:a="http://schemas.openxmlformats.org/drawingml/2006/main">
-            <a:off x="1000125" y="2276475"/>
-            <a:ext cx="476250" cy="419100"/>
+                <a16:creationId xmlns:a16="http://schemas.microsoft.com/office/drawing/2014/main" id="{B8EC00BC-6E67-49FA-A6B3-DB81FA2252C8}"/>
+              </a:ext>
+            </a:extLst>
+          </p:cNvPr>
+          <p:cNvSpPr>
+            <a:spLocks xmlns:a="http://schemas.openxmlformats.org/drawingml/2006/main" noGrp="1"/>
+          </p:cNvSpPr>
+          <p:nvPr/>
+        </p:nvSpPr>
+        <p:spPr>
+          <a:xfrm xmlns:a="http://schemas.openxmlformats.org/drawingml/2006/main">
+            <a:off x="1162050" y="2200275"/>
+            <a:ext cx="400050" cy="400050"/>
           </a:xfrm>
           <a:prstGeom xmlns:a="http://schemas.openxmlformats.org/drawingml/2006/main" prst="rect">
             <a:avLst/>
@@ -8326,9 +8328,9 @@
           <a:lstStyle xmlns:a="http://schemas.openxmlformats.org/drawingml/2006/main"/>
           <a:p xmlns:a="http://schemas.openxmlformats.org/drawingml/2006/main">
             <a:pPr algn="ctr">
-              <a:defRPr sz="1350" b="1">
-                <a:solidFill>
-                  <a:srgbClr val="FFFFFF"/>
+              <a:defRPr sz="1125" b="1">
+                <a:solidFill>
+                  <a:srgbClr val="2C6E73"/>
                 </a:solidFill>
                 <a:latin typeface="Arial"/>
                 <a:ea typeface="Arial"/>
@@ -8336,9 +8338,9 @@
               </a:defRPr>
             </a:pPr>
             <a:r>
-              <a:rPr sz="1350" b="1">
-                <a:solidFill>
-                  <a:srgbClr val="FFFFFF"/>
+              <a:rPr sz="1125" b="1">
+                <a:solidFill>
+                  <a:srgbClr val="2C6E73"/>
                 </a:solidFill>
                 <a:latin typeface="Arial"/>
                 <a:ea typeface="Arial"/>
@@ -8354,19 +8356,19 @@
           <p:cNvPr id="13" name="">
             <a:extLst xmlns:a="http://schemas.openxmlformats.org/drawingml/2006/main">
               <a:ext uri="{FF2B5EF4-FFF2-40B4-BE49-F238E27FC236}">
-                <a16:creationId xmlns:a16="http://schemas.microsoft.com/office/drawing/2014/main" id="{26D71F07-59F7-4AE1-AC0D-098369CEB11D}"/>
-              </a:ext>
-            </a:extLst>
-          </p:cNvPr>
-          <p:cNvSpPr>
-            <a:spLocks xmlns:a="http://schemas.openxmlformats.org/drawingml/2006/main" noGrp="1"/>
-          </p:cNvSpPr>
-          <p:nvPr/>
-        </p:nvSpPr>
-        <p:spPr>
-          <a:xfrm xmlns:a="http://schemas.openxmlformats.org/drawingml/2006/main">
-            <a:off x="1714500" y="2181225"/>
-            <a:ext cx="9429750" cy="609600"/>
+                <a16:creationId xmlns:a16="http://schemas.microsoft.com/office/drawing/2014/main" id="{AD3DE5DE-24DB-43D8-B9C1-1755307A60E0}"/>
+              </a:ext>
+            </a:extLst>
+          </p:cNvPr>
+          <p:cNvSpPr>
+            <a:spLocks xmlns:a="http://schemas.openxmlformats.org/drawingml/2006/main" noGrp="1"/>
+          </p:cNvSpPr>
+          <p:nvPr/>
+        </p:nvSpPr>
+        <p:spPr>
+          <a:xfrm xmlns:a="http://schemas.openxmlformats.org/drawingml/2006/main">
+            <a:off x="1714500" y="2114550"/>
+            <a:ext cx="9525000" cy="809625"/>
           </a:xfrm>
           <a:prstGeom xmlns:a="http://schemas.openxmlformats.org/drawingml/2006/main" prst="rect">
             <a:avLst/>
@@ -8383,7 +8385,7 @@
           <a:lstStyle xmlns:a="http://schemas.openxmlformats.org/drawingml/2006/main"/>
           <a:p xmlns:a="http://schemas.openxmlformats.org/drawingml/2006/main">
             <a:pPr algn="l">
-              <a:defRPr sz="1500" b="0">
+              <a:defRPr sz="1725" b="0">
                 <a:solidFill>
                   <a:srgbClr val="17253A"/>
                 </a:solidFill>
@@ -8393,7 +8395,7 @@
               </a:defRPr>
             </a:pPr>
             <a:r>
-              <a:rPr sz="1500" b="0">
+              <a:rPr sz="1725" b="0">
                 <a:solidFill>
                   <a:srgbClr val="17253A"/>
                 </a:solidFill>
@@ -8401,7 +8403,7 @@
                 <a:ea typeface="Arial"/>
                 <a:cs typeface="Arial"/>
               </a:rPr>
-              <a:t>Identify the structure: Retrieve the relevant fact, representation or formula.</a:t>
+              <a:t>Triangle area = 18 × 11 ÷ 2 = 99 cm²</a:t>
             </a:r>
           </a:p>
         </p:txBody>
@@ -8411,28 +8413,30 @@
           <p:cNvPr id="14" name="">
             <a:extLst xmlns:a="http://schemas.openxmlformats.org/drawingml/2006/main">
               <a:ext uri="{FF2B5EF4-FFF2-40B4-BE49-F238E27FC236}">
-                <a16:creationId xmlns:a16="http://schemas.microsoft.com/office/drawing/2014/main" id="{15594D96-8402-4FED-9A93-ACCE49EDB253}"/>
-              </a:ext>
-            </a:extLst>
-          </p:cNvPr>
-          <p:cNvSpPr>
-            <a:spLocks xmlns:a="http://schemas.openxmlformats.org/drawingml/2006/main" noGrp="1"/>
-          </p:cNvSpPr>
-          <p:nvPr/>
-        </p:nvSpPr>
-        <p:spPr>
-          <a:xfrm xmlns:a="http://schemas.openxmlformats.org/drawingml/2006/main">
-            <a:off x="1000125" y="2990850"/>
-            <a:ext cx="476250" cy="476250"/>
-          </a:xfrm>
-          <a:prstGeom xmlns:a="http://schemas.openxmlformats.org/drawingml/2006/main" prst="ellipse">
+                <a16:creationId xmlns:a16="http://schemas.microsoft.com/office/drawing/2014/main" id="{6ACDBA06-05F3-453A-8A42-C0988755C6C4}"/>
+              </a:ext>
+            </a:extLst>
+          </p:cNvPr>
+          <p:cNvSpPr>
+            <a:spLocks xmlns:a="http://schemas.openxmlformats.org/drawingml/2006/main" noGrp="1"/>
+          </p:cNvSpPr>
+          <p:nvPr/>
+        </p:nvSpPr>
+        <p:spPr>
+          <a:xfrm xmlns:a="http://schemas.openxmlformats.org/drawingml/2006/main">
+            <a:off x="1714500" y="2943225"/>
+            <a:ext cx="9334500" cy="9525"/>
+          </a:xfrm>
+          <a:prstGeom xmlns:a="http://schemas.openxmlformats.org/drawingml/2006/main" prst="rect">
             <a:avLst/>
           </a:prstGeom>
           <a:solidFill xmlns:a="http://schemas.openxmlformats.org/drawingml/2006/main">
-            <a:srgbClr val="2C6E73"/>
+            <a:srgbClr val="D9E0E6"/>
           </a:solidFill>
           <a:ln xmlns:a="http://schemas.openxmlformats.org/drawingml/2006/main" w="0">
-            <a:noFill/>
+            <a:solidFill>
+              <a:srgbClr val="D9E0E6"/>
+            </a:solidFill>
           </a:ln>
         </p:spPr>
       </p:sp>
@@ -8441,19 +8445,19 @@
           <p:cNvPr id="15" name="">
             <a:extLst xmlns:a="http://schemas.openxmlformats.org/drawingml/2006/main">
               <a:ext uri="{FF2B5EF4-FFF2-40B4-BE49-F238E27FC236}">
-                <a16:creationId xmlns:a16="http://schemas.microsoft.com/office/drawing/2014/main" id="{C511C81B-1EE1-4AD3-92AF-11076A9E9997}"/>
-              </a:ext>
-            </a:extLst>
-          </p:cNvPr>
-          <p:cNvSpPr>
-            <a:spLocks xmlns:a="http://schemas.openxmlformats.org/drawingml/2006/main" noGrp="1"/>
-          </p:cNvSpPr>
-          <p:nvPr/>
-        </p:nvSpPr>
-        <p:spPr>
-          <a:xfrm xmlns:a="http://schemas.openxmlformats.org/drawingml/2006/main">
-            <a:off x="1000125" y="3019425"/>
-            <a:ext cx="476250" cy="419100"/>
+                <a16:creationId xmlns:a16="http://schemas.microsoft.com/office/drawing/2014/main" id="{5EFF808F-226A-4001-8182-1DFC7A982FCD}"/>
+              </a:ext>
+            </a:extLst>
+          </p:cNvPr>
+          <p:cNvSpPr>
+            <a:spLocks xmlns:a="http://schemas.openxmlformats.org/drawingml/2006/main" noGrp="1"/>
+          </p:cNvSpPr>
+          <p:nvPr/>
+        </p:nvSpPr>
+        <p:spPr>
+          <a:xfrm xmlns:a="http://schemas.openxmlformats.org/drawingml/2006/main">
+            <a:off x="1162050" y="3076575"/>
+            <a:ext cx="400050" cy="400050"/>
           </a:xfrm>
           <a:prstGeom xmlns:a="http://schemas.openxmlformats.org/drawingml/2006/main" prst="rect">
             <a:avLst/>
@@ -8470,9 +8474,9 @@
           <a:lstStyle xmlns:a="http://schemas.openxmlformats.org/drawingml/2006/main"/>
           <a:p xmlns:a="http://schemas.openxmlformats.org/drawingml/2006/main">
             <a:pPr algn="ctr">
-              <a:defRPr sz="1350" b="1">
-                <a:solidFill>
-                  <a:srgbClr val="FFFFFF"/>
+              <a:defRPr sz="1125" b="1">
+                <a:solidFill>
+                  <a:srgbClr val="2C6E73"/>
                 </a:solidFill>
                 <a:latin typeface="Arial"/>
                 <a:ea typeface="Arial"/>
@@ -8480,9 +8484,9 @@
               </a:defRPr>
             </a:pPr>
             <a:r>
-              <a:rPr sz="1350" b="1">
-                <a:solidFill>
-                  <a:srgbClr val="FFFFFF"/>
+              <a:rPr sz="1125" b="1">
+                <a:solidFill>
+                  <a:srgbClr val="2C6E73"/>
                 </a:solidFill>
                 <a:latin typeface="Arial"/>
                 <a:ea typeface="Arial"/>
@@ -8498,19 +8502,19 @@
           <p:cNvPr id="16" name="">
             <a:extLst xmlns:a="http://schemas.openxmlformats.org/drawingml/2006/main">
               <a:ext uri="{FF2B5EF4-FFF2-40B4-BE49-F238E27FC236}">
-                <a16:creationId xmlns:a16="http://schemas.microsoft.com/office/drawing/2014/main" id="{F28C4C79-35C7-4474-A440-96405E9A0561}"/>
-              </a:ext>
-            </a:extLst>
-          </p:cNvPr>
-          <p:cNvSpPr>
-            <a:spLocks xmlns:a="http://schemas.openxmlformats.org/drawingml/2006/main" noGrp="1"/>
-          </p:cNvSpPr>
-          <p:nvPr/>
-        </p:nvSpPr>
-        <p:spPr>
-          <a:xfrm xmlns:a="http://schemas.openxmlformats.org/drawingml/2006/main">
-            <a:off x="1714500" y="2924175"/>
-            <a:ext cx="9429750" cy="609600"/>
+                <a16:creationId xmlns:a16="http://schemas.microsoft.com/office/drawing/2014/main" id="{AE8C43DA-09E0-46ED-BC55-3163703AF3BF}"/>
+              </a:ext>
+            </a:extLst>
+          </p:cNvPr>
+          <p:cNvSpPr>
+            <a:spLocks xmlns:a="http://schemas.openxmlformats.org/drawingml/2006/main" noGrp="1"/>
+          </p:cNvSpPr>
+          <p:nvPr/>
+        </p:nvSpPr>
+        <p:spPr>
+          <a:xfrm xmlns:a="http://schemas.openxmlformats.org/drawingml/2006/main">
+            <a:off x="1714500" y="2990850"/>
+            <a:ext cx="9525000" cy="809625"/>
           </a:xfrm>
           <a:prstGeom xmlns:a="http://schemas.openxmlformats.org/drawingml/2006/main" prst="rect">
             <a:avLst/>
@@ -8527,7 +8531,7 @@
           <a:lstStyle xmlns:a="http://schemas.openxmlformats.org/drawingml/2006/main"/>
           <a:p xmlns:a="http://schemas.openxmlformats.org/drawingml/2006/main">
             <a:pPr algn="l">
-              <a:defRPr sz="1500" b="0">
+              <a:defRPr sz="1725" b="0">
                 <a:solidFill>
                   <a:srgbClr val="17253A"/>
                 </a:solidFill>
@@ -8537,7 +8541,7 @@
               </a:defRPr>
             </a:pPr>
             <a:r>
-              <a:rPr sz="1500" b="0">
+              <a:rPr sz="1725" b="0">
                 <a:solidFill>
                   <a:srgbClr val="17253A"/>
                 </a:solidFill>
@@ -8545,7 +8549,7 @@
                 <a:ea typeface="Arial"/>
                 <a:cs typeface="Arial"/>
               </a:rPr>
-              <a:t>Set up the method: Show a complete method and explain the mathematical decision.</a:t>
+              <a:t>18 + 22 + 25 + 15 = 80</a:t>
             </a:r>
           </a:p>
         </p:txBody>
@@ -8555,28 +8559,30 @@
           <p:cNvPr id="17" name="">
             <a:extLst xmlns:a="http://schemas.openxmlformats.org/drawingml/2006/main">
               <a:ext uri="{FF2B5EF4-FFF2-40B4-BE49-F238E27FC236}">
-                <a16:creationId xmlns:a16="http://schemas.microsoft.com/office/drawing/2014/main" id="{C9952489-9100-4E4C-83F5-C143B0EAB5BA}"/>
-              </a:ext>
-            </a:extLst>
-          </p:cNvPr>
-          <p:cNvSpPr>
-            <a:spLocks xmlns:a="http://schemas.openxmlformats.org/drawingml/2006/main" noGrp="1"/>
-          </p:cNvSpPr>
-          <p:nvPr/>
-        </p:nvSpPr>
-        <p:spPr>
-          <a:xfrm xmlns:a="http://schemas.openxmlformats.org/drawingml/2006/main">
-            <a:off x="1000125" y="3733800"/>
-            <a:ext cx="476250" cy="476250"/>
-          </a:xfrm>
-          <a:prstGeom xmlns:a="http://schemas.openxmlformats.org/drawingml/2006/main" prst="ellipse">
+                <a16:creationId xmlns:a16="http://schemas.microsoft.com/office/drawing/2014/main" id="{786CC828-BA75-4247-94B0-369B374ED1AF}"/>
+              </a:ext>
+            </a:extLst>
+          </p:cNvPr>
+          <p:cNvSpPr>
+            <a:spLocks xmlns:a="http://schemas.openxmlformats.org/drawingml/2006/main" noGrp="1"/>
+          </p:cNvSpPr>
+          <p:nvPr/>
+        </p:nvSpPr>
+        <p:spPr>
+          <a:xfrm xmlns:a="http://schemas.openxmlformats.org/drawingml/2006/main">
+            <a:off x="1714500" y="3819525"/>
+            <a:ext cx="9334500" cy="9525"/>
+          </a:xfrm>
+          <a:prstGeom xmlns:a="http://schemas.openxmlformats.org/drawingml/2006/main" prst="rect">
             <a:avLst/>
           </a:prstGeom>
           <a:solidFill xmlns:a="http://schemas.openxmlformats.org/drawingml/2006/main">
-            <a:srgbClr val="2C6E73"/>
+            <a:srgbClr val="D9E0E6"/>
           </a:solidFill>
           <a:ln xmlns:a="http://schemas.openxmlformats.org/drawingml/2006/main" w="0">
-            <a:noFill/>
+            <a:solidFill>
+              <a:srgbClr val="D9E0E6"/>
+            </a:solidFill>
           </a:ln>
         </p:spPr>
       </p:sp>
@@ -8585,19 +8591,19 @@
           <p:cNvPr id="18" name="">
             <a:extLst xmlns:a="http://schemas.openxmlformats.org/drawingml/2006/main">
               <a:ext uri="{FF2B5EF4-FFF2-40B4-BE49-F238E27FC236}">
-                <a16:creationId xmlns:a16="http://schemas.microsoft.com/office/drawing/2014/main" id="{1A35BD5A-CD91-4EC7-9CAA-2D167E2CB43D}"/>
-              </a:ext>
-            </a:extLst>
-          </p:cNvPr>
-          <p:cNvSpPr>
-            <a:spLocks xmlns:a="http://schemas.openxmlformats.org/drawingml/2006/main" noGrp="1"/>
-          </p:cNvSpPr>
-          <p:nvPr/>
-        </p:nvSpPr>
-        <p:spPr>
-          <a:xfrm xmlns:a="http://schemas.openxmlformats.org/drawingml/2006/main">
-            <a:off x="1000125" y="3762375"/>
-            <a:ext cx="476250" cy="419100"/>
+                <a16:creationId xmlns:a16="http://schemas.microsoft.com/office/drawing/2014/main" id="{DA91618D-9225-4608-807E-7A24D664A012}"/>
+              </a:ext>
+            </a:extLst>
+          </p:cNvPr>
+          <p:cNvSpPr>
+            <a:spLocks xmlns:a="http://schemas.openxmlformats.org/drawingml/2006/main" noGrp="1"/>
+          </p:cNvSpPr>
+          <p:nvPr/>
+        </p:nvSpPr>
+        <p:spPr>
+          <a:xfrm xmlns:a="http://schemas.openxmlformats.org/drawingml/2006/main">
+            <a:off x="1162050" y="3952875"/>
+            <a:ext cx="400050" cy="400050"/>
           </a:xfrm>
           <a:prstGeom xmlns:a="http://schemas.openxmlformats.org/drawingml/2006/main" prst="rect">
             <a:avLst/>
@@ -8614,9 +8620,9 @@
           <a:lstStyle xmlns:a="http://schemas.openxmlformats.org/drawingml/2006/main"/>
           <a:p xmlns:a="http://schemas.openxmlformats.org/drawingml/2006/main">
             <a:pPr algn="ctr">
-              <a:defRPr sz="1350" b="1">
-                <a:solidFill>
-                  <a:srgbClr val="FFFFFF"/>
+              <a:defRPr sz="1125" b="1">
+                <a:solidFill>
+                  <a:srgbClr val="2C6E73"/>
                 </a:solidFill>
                 <a:latin typeface="Arial"/>
                 <a:ea typeface="Arial"/>
@@ -8624,9 +8630,9 @@
               </a:defRPr>
             </a:pPr>
             <a:r>
-              <a:rPr sz="1350" b="1">
-                <a:solidFill>
-                  <a:srgbClr val="FFFFFF"/>
+              <a:rPr sz="1125" b="1">
+                <a:solidFill>
+                  <a:srgbClr val="2C6E73"/>
                 </a:solidFill>
                 <a:latin typeface="Arial"/>
                 <a:ea typeface="Arial"/>
@@ -8642,19 +8648,19 @@
           <p:cNvPr id="19" name="">
             <a:extLst xmlns:a="http://schemas.openxmlformats.org/drawingml/2006/main">
               <a:ext uri="{FF2B5EF4-FFF2-40B4-BE49-F238E27FC236}">
-                <a16:creationId xmlns:a16="http://schemas.microsoft.com/office/drawing/2014/main" id="{0976A34B-D839-44EC-886C-D319C7EACFAF}"/>
-              </a:ext>
-            </a:extLst>
-          </p:cNvPr>
-          <p:cNvSpPr>
-            <a:spLocks xmlns:a="http://schemas.openxmlformats.org/drawingml/2006/main" noGrp="1"/>
-          </p:cNvSpPr>
-          <p:nvPr/>
-        </p:nvSpPr>
-        <p:spPr>
-          <a:xfrm xmlns:a="http://schemas.openxmlformats.org/drawingml/2006/main">
-            <a:off x="1714500" y="3667125"/>
-            <a:ext cx="9429750" cy="609600"/>
+                <a16:creationId xmlns:a16="http://schemas.microsoft.com/office/drawing/2014/main" id="{DAC99D60-9921-4D0E-9B01-36FD8E48D572}"/>
+              </a:ext>
+            </a:extLst>
+          </p:cNvPr>
+          <p:cNvSpPr>
+            <a:spLocks xmlns:a="http://schemas.openxmlformats.org/drawingml/2006/main" noGrp="1"/>
+          </p:cNvSpPr>
+          <p:nvPr/>
+        </p:nvSpPr>
+        <p:spPr>
+          <a:xfrm xmlns:a="http://schemas.openxmlformats.org/drawingml/2006/main">
+            <a:off x="1714500" y="3867150"/>
+            <a:ext cx="9525000" cy="809625"/>
           </a:xfrm>
           <a:prstGeom xmlns:a="http://schemas.openxmlformats.org/drawingml/2006/main" prst="rect">
             <a:avLst/>
@@ -8671,7 +8677,7 @@
           <a:lstStyle xmlns:a="http://schemas.openxmlformats.org/drawingml/2006/main"/>
           <a:p xmlns:a="http://schemas.openxmlformats.org/drawingml/2006/main">
             <a:pPr algn="l">
-              <a:defRPr sz="1500" b="0">
+              <a:defRPr sz="1725" b="0">
                 <a:solidFill>
                   <a:srgbClr val="17253A"/>
                 </a:solidFill>
@@ -8681,7 +8687,7 @@
               </a:defRPr>
             </a:pPr>
             <a:r>
-              <a:rPr sz="1500" b="0">
+              <a:rPr sz="1725" b="0">
                 <a:solidFill>
                   <a:srgbClr val="17253A"/>
                 </a:solidFill>
@@ -8689,7 +8695,7 @@
                 <a:ea typeface="Arial"/>
                 <a:cs typeface="Arial"/>
               </a:rPr>
-              <a:t>Complete the calculation: 99 cm2 and 20.</a:t>
+              <a:t>Mean = 80 ÷ 4</a:t>
             </a:r>
           </a:p>
         </p:txBody>
@@ -8699,28 +8705,30 @@
           <p:cNvPr id="20" name="">
             <a:extLst xmlns:a="http://schemas.openxmlformats.org/drawingml/2006/main">
               <a:ext uri="{FF2B5EF4-FFF2-40B4-BE49-F238E27FC236}">
-                <a16:creationId xmlns:a16="http://schemas.microsoft.com/office/drawing/2014/main" id="{7EB61900-7F57-4BE5-A120-282AB22D076C}"/>
-              </a:ext>
-            </a:extLst>
-          </p:cNvPr>
-          <p:cNvSpPr>
-            <a:spLocks xmlns:a="http://schemas.openxmlformats.org/drawingml/2006/main" noGrp="1"/>
-          </p:cNvSpPr>
-          <p:nvPr/>
-        </p:nvSpPr>
-        <p:spPr>
-          <a:xfrm xmlns:a="http://schemas.openxmlformats.org/drawingml/2006/main">
-            <a:off x="1000125" y="4476750"/>
-            <a:ext cx="476250" cy="476250"/>
-          </a:xfrm>
-          <a:prstGeom xmlns:a="http://schemas.openxmlformats.org/drawingml/2006/main" prst="ellipse">
+                <a16:creationId xmlns:a16="http://schemas.microsoft.com/office/drawing/2014/main" id="{6068595F-5DA0-4D3A-BB6D-D3D53D31802A}"/>
+              </a:ext>
+            </a:extLst>
+          </p:cNvPr>
+          <p:cNvSpPr>
+            <a:spLocks xmlns:a="http://schemas.openxmlformats.org/drawingml/2006/main" noGrp="1"/>
+          </p:cNvSpPr>
+          <p:nvPr/>
+        </p:nvSpPr>
+        <p:spPr>
+          <a:xfrm xmlns:a="http://schemas.openxmlformats.org/drawingml/2006/main">
+            <a:off x="1714500" y="4695825"/>
+            <a:ext cx="9334500" cy="9525"/>
+          </a:xfrm>
+          <a:prstGeom xmlns:a="http://schemas.openxmlformats.org/drawingml/2006/main" prst="rect">
             <a:avLst/>
           </a:prstGeom>
           <a:solidFill xmlns:a="http://schemas.openxmlformats.org/drawingml/2006/main">
-            <a:srgbClr val="2C6E73"/>
+            <a:srgbClr val="D9E0E6"/>
           </a:solidFill>
           <a:ln xmlns:a="http://schemas.openxmlformats.org/drawingml/2006/main" w="0">
-            <a:noFill/>
+            <a:solidFill>
+              <a:srgbClr val="D9E0E6"/>
+            </a:solidFill>
           </a:ln>
         </p:spPr>
       </p:sp>
@@ -8729,19 +8737,19 @@
           <p:cNvPr id="21" name="">
             <a:extLst xmlns:a="http://schemas.openxmlformats.org/drawingml/2006/main">
               <a:ext uri="{FF2B5EF4-FFF2-40B4-BE49-F238E27FC236}">
-                <a16:creationId xmlns:a16="http://schemas.microsoft.com/office/drawing/2014/main" id="{F70F06BE-ED82-428C-9FBF-97C854F74C33}"/>
-              </a:ext>
-            </a:extLst>
-          </p:cNvPr>
-          <p:cNvSpPr>
-            <a:spLocks xmlns:a="http://schemas.openxmlformats.org/drawingml/2006/main" noGrp="1"/>
-          </p:cNvSpPr>
-          <p:nvPr/>
-        </p:nvSpPr>
-        <p:spPr>
-          <a:xfrm xmlns:a="http://schemas.openxmlformats.org/drawingml/2006/main">
-            <a:off x="1000125" y="4505325"/>
-            <a:ext cx="476250" cy="419100"/>
+                <a16:creationId xmlns:a16="http://schemas.microsoft.com/office/drawing/2014/main" id="{3F500A18-B135-458C-8529-0DCEDF30593D}"/>
+              </a:ext>
+            </a:extLst>
+          </p:cNvPr>
+          <p:cNvSpPr>
+            <a:spLocks xmlns:a="http://schemas.openxmlformats.org/drawingml/2006/main" noGrp="1"/>
+          </p:cNvSpPr>
+          <p:nvPr/>
+        </p:nvSpPr>
+        <p:spPr>
+          <a:xfrm xmlns:a="http://schemas.openxmlformats.org/drawingml/2006/main">
+            <a:off x="1162050" y="4829175"/>
+            <a:ext cx="400050" cy="400050"/>
           </a:xfrm>
           <a:prstGeom xmlns:a="http://schemas.openxmlformats.org/drawingml/2006/main" prst="rect">
             <a:avLst/>
@@ -8758,9 +8766,9 @@
           <a:lstStyle xmlns:a="http://schemas.openxmlformats.org/drawingml/2006/main"/>
           <a:p xmlns:a="http://schemas.openxmlformats.org/drawingml/2006/main">
             <a:pPr algn="ctr">
-              <a:defRPr sz="1350" b="1">
-                <a:solidFill>
-                  <a:srgbClr val="FFFFFF"/>
+              <a:defRPr sz="1125" b="1">
+                <a:solidFill>
+                  <a:srgbClr val="2F785D"/>
                 </a:solidFill>
                 <a:latin typeface="Arial"/>
                 <a:ea typeface="Arial"/>
@@ -8768,9 +8776,9 @@
               </a:defRPr>
             </a:pPr>
             <a:r>
-              <a:rPr sz="1350" b="1">
-                <a:solidFill>
-                  <a:srgbClr val="FFFFFF"/>
+              <a:rPr sz="1125" b="1">
+                <a:solidFill>
+                  <a:srgbClr val="2F785D"/>
                 </a:solidFill>
                 <a:latin typeface="Arial"/>
                 <a:ea typeface="Arial"/>
@@ -8786,19 +8794,19 @@
           <p:cNvPr id="22" name="">
             <a:extLst xmlns:a="http://schemas.openxmlformats.org/drawingml/2006/main">
               <a:ext uri="{FF2B5EF4-FFF2-40B4-BE49-F238E27FC236}">
-                <a16:creationId xmlns:a16="http://schemas.microsoft.com/office/drawing/2014/main" id="{A726857C-4750-4B12-82FE-960EB693E172}"/>
-              </a:ext>
-            </a:extLst>
-          </p:cNvPr>
-          <p:cNvSpPr>
-            <a:spLocks xmlns:a="http://schemas.openxmlformats.org/drawingml/2006/main" noGrp="1"/>
-          </p:cNvSpPr>
-          <p:nvPr/>
-        </p:nvSpPr>
-        <p:spPr>
-          <a:xfrm xmlns:a="http://schemas.openxmlformats.org/drawingml/2006/main">
-            <a:off x="1714500" y="4410075"/>
-            <a:ext cx="9429750" cy="609600"/>
+                <a16:creationId xmlns:a16="http://schemas.microsoft.com/office/drawing/2014/main" id="{DF7787D4-714D-4A60-8A8B-0E32F256F1CA}"/>
+              </a:ext>
+            </a:extLst>
+          </p:cNvPr>
+          <p:cNvSpPr>
+            <a:spLocks xmlns:a="http://schemas.openxmlformats.org/drawingml/2006/main" noGrp="1"/>
+          </p:cNvSpPr>
+          <p:nvPr/>
+        </p:nvSpPr>
+        <p:spPr>
+          <a:xfrm xmlns:a="http://schemas.openxmlformats.org/drawingml/2006/main">
+            <a:off x="1714500" y="4743450"/>
+            <a:ext cx="9525000" cy="809625"/>
           </a:xfrm>
           <a:prstGeom xmlns:a="http://schemas.openxmlformats.org/drawingml/2006/main" prst="rect">
             <a:avLst/>
@@ -8815,7 +8823,7 @@
           <a:lstStyle xmlns:a="http://schemas.openxmlformats.org/drawingml/2006/main"/>
           <a:p xmlns:a="http://schemas.openxmlformats.org/drawingml/2006/main">
             <a:pPr algn="l">
-              <a:defRPr sz="1500" b="1">
+              <a:defRPr sz="1725" b="1">
                 <a:solidFill>
                   <a:srgbClr val="2F785D"/>
                 </a:solidFill>
@@ -8825,7 +8833,7 @@
               </a:defRPr>
             </a:pPr>
             <a:r>
-              <a:rPr sz="1500" b="1">
+              <a:rPr sz="1725" b="1">
                 <a:solidFill>
                   <a:srgbClr val="2F785D"/>
                 </a:solidFill>
@@ -8833,7 +8841,7 @@
                 <a:ea typeface="Arial"/>
                 <a:cs typeface="Arial"/>
               </a:rPr>
-              <a:t>Check the result: Check the result and record a precise transition target.</a:t>
+              <a:t>Answers: 99 cm² and 20</a:t>
             </a:r>
           </a:p>
         </p:txBody>
@@ -8841,7 +8849,7 @@
     </p:spTree>
     <p:extLst>
       <p:ext uri="{BB962C8B-B14F-4D97-AF65-F5344CB8AC3E}">
-        <p14:creationId xmlns:p14="http://schemas.microsoft.com/office/powerpoint/2010/main" val="1642144271"/>
+        <p14:creationId xmlns:p14="http://schemas.microsoft.com/office/powerpoint/2010/main" val="1633724977"/>
       </p:ext>
     </p:extLst>
   </p:cSld>
@@ -9134,7 +9142,7 @@
           <p:cNvPr id="15" name="">
             <a:extLst xmlns:a="http://schemas.openxmlformats.org/drawingml/2006/main">
               <a:ext uri="{FF2B5EF4-FFF2-40B4-BE49-F238E27FC236}">
-                <a16:creationId xmlns:a16="http://schemas.microsoft.com/office/drawing/2014/main" id="{C3A36E17-EC9B-4069-972F-148E88594CCF}"/>
+                <a16:creationId xmlns:a16="http://schemas.microsoft.com/office/drawing/2014/main" id="{C868B4F1-A424-4E87-8EBE-BECEA15C3B79}"/>
               </a:ext>
             </a:extLst>
           </p:cNvPr>
@@ -9166,7 +9174,7 @@
           <p:cNvPr id="2" name="">
             <a:extLst xmlns:a="http://schemas.openxmlformats.org/drawingml/2006/main">
               <a:ext uri="{FF2B5EF4-FFF2-40B4-BE49-F238E27FC236}">
-                <a16:creationId xmlns:a16="http://schemas.microsoft.com/office/drawing/2014/main" id="{A8332788-BE55-4EF8-BEB6-5FDBB4F429E3}"/>
+                <a16:creationId xmlns:a16="http://schemas.microsoft.com/office/drawing/2014/main" id="{9B5AE917-2D2F-4AC7-9B13-2BA4B81A04DE}"/>
               </a:ext>
             </a:extLst>
           </p:cNvPr>
@@ -9223,7 +9231,7 @@
           <p:cNvPr id="3" name="">
             <a:extLst xmlns:a="http://schemas.openxmlformats.org/drawingml/2006/main">
               <a:ext uri="{FF2B5EF4-FFF2-40B4-BE49-F238E27FC236}">
-                <a16:creationId xmlns:a16="http://schemas.microsoft.com/office/drawing/2014/main" id="{B3346816-036B-4A90-9FD9-6F1D9DCC3F03}"/>
+                <a16:creationId xmlns:a16="http://schemas.microsoft.com/office/drawing/2014/main" id="{843AF7B6-C2BC-4252-B818-9C304D0F89EE}"/>
               </a:ext>
             </a:extLst>
           </p:cNvPr>
@@ -9255,7 +9263,7 @@
           <p:cNvPr id="4" name="">
             <a:extLst xmlns:a="http://schemas.openxmlformats.org/drawingml/2006/main">
               <a:ext uri="{FF2B5EF4-FFF2-40B4-BE49-F238E27FC236}">
-                <a16:creationId xmlns:a16="http://schemas.microsoft.com/office/drawing/2014/main" id="{B754F5B7-DB43-4FDE-AA47-381C9F5DEFF6}"/>
+                <a16:creationId xmlns:a16="http://schemas.microsoft.com/office/drawing/2014/main" id="{15ED5781-E9C7-4DEA-B66D-DDD6674C8CBA}"/>
               </a:ext>
             </a:extLst>
           </p:cNvPr>
@@ -9312,7 +9320,7 @@
           <p:cNvPr id="5" name="">
             <a:extLst xmlns:a="http://schemas.openxmlformats.org/drawingml/2006/main">
               <a:ext uri="{FF2B5EF4-FFF2-40B4-BE49-F238E27FC236}">
-                <a16:creationId xmlns:a16="http://schemas.microsoft.com/office/drawing/2014/main" id="{CDEC46E5-E02E-4FC3-8E7C-B1ACFA84908B}"/>
+                <a16:creationId xmlns:a16="http://schemas.microsoft.com/office/drawing/2014/main" id="{6B502247-C09D-4FD5-97A7-9417796F3E7D}"/>
               </a:ext>
             </a:extLst>
           </p:cNvPr>
@@ -9369,7 +9377,7 @@
           <p:cNvPr id="6" name="">
             <a:extLst xmlns:a="http://schemas.openxmlformats.org/drawingml/2006/main">
               <a:ext uri="{FF2B5EF4-FFF2-40B4-BE49-F238E27FC236}">
-                <a16:creationId xmlns:a16="http://schemas.microsoft.com/office/drawing/2014/main" id="{E659629F-CF18-4DFC-8529-1D4CDABA82B0}"/>
+                <a16:creationId xmlns:a16="http://schemas.microsoft.com/office/drawing/2014/main" id="{CE10F407-4100-4D03-870C-23012054B7F4}"/>
               </a:ext>
             </a:extLst>
           </p:cNvPr>
@@ -9426,7 +9434,7 @@
           <p:cNvPr id="7" name="">
             <a:extLst xmlns:a="http://schemas.openxmlformats.org/drawingml/2006/main">
               <a:ext uri="{FF2B5EF4-FFF2-40B4-BE49-F238E27FC236}">
-                <a16:creationId xmlns:a16="http://schemas.microsoft.com/office/drawing/2014/main" id="{A181903D-E48B-4F4F-B9AD-348E31813F85}"/>
+                <a16:creationId xmlns:a16="http://schemas.microsoft.com/office/drawing/2014/main" id="{B408C6A2-98ED-44EE-95A7-80F894323820}"/>
               </a:ext>
             </a:extLst>
           </p:cNvPr>
@@ -9458,7 +9466,7 @@
           <p:cNvPr id="8" name="">
             <a:extLst xmlns:a="http://schemas.openxmlformats.org/drawingml/2006/main">
               <a:ext uri="{FF2B5EF4-FFF2-40B4-BE49-F238E27FC236}">
-                <a16:creationId xmlns:a16="http://schemas.microsoft.com/office/drawing/2014/main" id="{8D36727E-1208-44AA-ADED-A5104DA480B6}"/>
+                <a16:creationId xmlns:a16="http://schemas.microsoft.com/office/drawing/2014/main" id="{7C3137EB-57F3-4868-BA2A-325ABCB16E2C}"/>
               </a:ext>
             </a:extLst>
           </p:cNvPr>
@@ -9515,7 +9523,7 @@
           <p:cNvPr id="9" name="">
             <a:extLst xmlns:a="http://schemas.openxmlformats.org/drawingml/2006/main">
               <a:ext uri="{FF2B5EF4-FFF2-40B4-BE49-F238E27FC236}">
-                <a16:creationId xmlns:a16="http://schemas.microsoft.com/office/drawing/2014/main" id="{86B92F60-4450-49A0-B8F4-BF1E236EAC05}"/>
+                <a16:creationId xmlns:a16="http://schemas.microsoft.com/office/drawing/2014/main" id="{A87B7885-8878-4017-8C32-B8C88FBBC4C9}"/>
               </a:ext>
             </a:extLst>
           </p:cNvPr>
@@ -9572,7 +9580,7 @@
           <p:cNvPr id="10" name="">
             <a:extLst xmlns:a="http://schemas.openxmlformats.org/drawingml/2006/main">
               <a:ext uri="{FF2B5EF4-FFF2-40B4-BE49-F238E27FC236}">
-                <a16:creationId xmlns:a16="http://schemas.microsoft.com/office/drawing/2014/main" id="{B401A8E0-CD21-4915-BD2D-1E4F56594FDC}"/>
+                <a16:creationId xmlns:a16="http://schemas.microsoft.com/office/drawing/2014/main" id="{79732F0F-7BFF-4FFE-9398-904CC9AF7C73}"/>
               </a:ext>
             </a:extLst>
           </p:cNvPr>
@@ -9629,7 +9637,7 @@
           <p:cNvPr id="11" name="">
             <a:extLst xmlns:a="http://schemas.openxmlformats.org/drawingml/2006/main">
               <a:ext uri="{FF2B5EF4-FFF2-40B4-BE49-F238E27FC236}">
-                <a16:creationId xmlns:a16="http://schemas.microsoft.com/office/drawing/2014/main" id="{B3298C5D-E9F1-47F1-8198-FEDBAC4D82F6}"/>
+                <a16:creationId xmlns:a16="http://schemas.microsoft.com/office/drawing/2014/main" id="{89675591-34A5-46D2-A721-59E43561CA08}"/>
               </a:ext>
             </a:extLst>
           </p:cNvPr>
@@ -9686,7 +9694,7 @@
           <p:cNvPr id="12" name="">
             <a:extLst xmlns:a="http://schemas.openxmlformats.org/drawingml/2006/main">
               <a:ext uri="{FF2B5EF4-FFF2-40B4-BE49-F238E27FC236}">
-                <a16:creationId xmlns:a16="http://schemas.microsoft.com/office/drawing/2014/main" id="{70D9AD0C-E79F-40EC-A6B1-86107DCCB45B}"/>
+                <a16:creationId xmlns:a16="http://schemas.microsoft.com/office/drawing/2014/main" id="{E8D7D088-7A50-4A2E-83E6-8F35646D5025}"/>
               </a:ext>
             </a:extLst>
           </p:cNvPr>
@@ -9718,7 +9726,7 @@
           <p:cNvPr id="13" name="">
             <a:extLst xmlns:a="http://schemas.openxmlformats.org/drawingml/2006/main">
               <a:ext uri="{FF2B5EF4-FFF2-40B4-BE49-F238E27FC236}">
-                <a16:creationId xmlns:a16="http://schemas.microsoft.com/office/drawing/2014/main" id="{62D3B817-60ED-45B8-AF0C-E568F6418B2A}"/>
+                <a16:creationId xmlns:a16="http://schemas.microsoft.com/office/drawing/2014/main" id="{0334B0CC-B741-485C-A02E-5929E84E8A30}"/>
               </a:ext>
             </a:extLst>
           </p:cNvPr>
@@ -9775,7 +9783,7 @@
           <p:cNvPr id="14" name="">
             <a:extLst xmlns:a="http://schemas.openxmlformats.org/drawingml/2006/main">
               <a:ext uri="{FF2B5EF4-FFF2-40B4-BE49-F238E27FC236}">
-                <a16:creationId xmlns:a16="http://schemas.microsoft.com/office/drawing/2014/main" id="{A712A137-A65C-4E38-87E0-DD6E3990DBD3}"/>
+                <a16:creationId xmlns:a16="http://schemas.microsoft.com/office/drawing/2014/main" id="{C594799A-0901-4691-82A1-FEB73FBFD4E8}"/>
               </a:ext>
             </a:extLst>
           </p:cNvPr>
@@ -9830,7 +9838,7 @@
     </p:spTree>
     <p:extLst>
       <p:ext uri="{BB962C8B-B14F-4D97-AF65-F5344CB8AC3E}">
-        <p14:creationId xmlns:p14="http://schemas.microsoft.com/office/powerpoint/2010/main" val="522355801"/>
+        <p14:creationId xmlns:p14="http://schemas.microsoft.com/office/powerpoint/2010/main" val="1787477"/>
       </p:ext>
     </p:extLst>
   </p:cSld>
@@ -10031,7 +10039,7 @@
           <p:cNvPr id="16" name="">
             <a:extLst xmlns:a="http://schemas.openxmlformats.org/drawingml/2006/main">
               <a:ext uri="{FF2B5EF4-FFF2-40B4-BE49-F238E27FC236}">
-                <a16:creationId xmlns:a16="http://schemas.microsoft.com/office/drawing/2014/main" id="{49A4767E-F2E6-4878-A314-0B0CAFFDB088}"/>
+                <a16:creationId xmlns:a16="http://schemas.microsoft.com/office/drawing/2014/main" id="{0B952543-9B11-44E4-AD31-998DFFE4E96E}"/>
               </a:ext>
             </a:extLst>
           </p:cNvPr>
@@ -10063,7 +10071,7 @@
           <p:cNvPr id="2" name="">
             <a:extLst xmlns:a="http://schemas.openxmlformats.org/drawingml/2006/main">
               <a:ext uri="{FF2B5EF4-FFF2-40B4-BE49-F238E27FC236}">
-                <a16:creationId xmlns:a16="http://schemas.microsoft.com/office/drawing/2014/main" id="{2E54C0CA-EE5B-47F6-A802-25F0DAB8DC7A}"/>
+                <a16:creationId xmlns:a16="http://schemas.microsoft.com/office/drawing/2014/main" id="{83619A39-D9F6-4AEE-B0C7-74C470633A01}"/>
               </a:ext>
             </a:extLst>
           </p:cNvPr>
@@ -10120,7 +10128,7 @@
           <p:cNvPr id="3" name="">
             <a:extLst xmlns:a="http://schemas.openxmlformats.org/drawingml/2006/main">
               <a:ext uri="{FF2B5EF4-FFF2-40B4-BE49-F238E27FC236}">
-                <a16:creationId xmlns:a16="http://schemas.microsoft.com/office/drawing/2014/main" id="{0E4D6203-A204-4F86-A0A8-2ECAFCDCB13F}"/>
+                <a16:creationId xmlns:a16="http://schemas.microsoft.com/office/drawing/2014/main" id="{DDA6FA41-DFCE-47D1-A455-17DFB425C036}"/>
               </a:ext>
             </a:extLst>
           </p:cNvPr>
@@ -10152,7 +10160,7 @@
           <p:cNvPr id="4" name="">
             <a:extLst xmlns:a="http://schemas.openxmlformats.org/drawingml/2006/main">
               <a:ext uri="{FF2B5EF4-FFF2-40B4-BE49-F238E27FC236}">
-                <a16:creationId xmlns:a16="http://schemas.microsoft.com/office/drawing/2014/main" id="{A1A904DC-E5C6-45F5-A5B8-361A256FC140}"/>
+                <a16:creationId xmlns:a16="http://schemas.microsoft.com/office/drawing/2014/main" id="{B543DBE4-DC26-4C01-A5A5-D05AFFD5CE2E}"/>
               </a:ext>
             </a:extLst>
           </p:cNvPr>
@@ -10209,7 +10217,7 @@
           <p:cNvPr id="5" name="">
             <a:extLst xmlns:a="http://schemas.openxmlformats.org/drawingml/2006/main">
               <a:ext uri="{FF2B5EF4-FFF2-40B4-BE49-F238E27FC236}">
-                <a16:creationId xmlns:a16="http://schemas.microsoft.com/office/drawing/2014/main" id="{C48D1BE1-936F-407E-872C-75604BAEFA69}"/>
+                <a16:creationId xmlns:a16="http://schemas.microsoft.com/office/drawing/2014/main" id="{71A60DEF-57F1-4B03-B883-D2E6D67DA5E1}"/>
               </a:ext>
             </a:extLst>
           </p:cNvPr>
@@ -10266,7 +10274,7 @@
           <p:cNvPr id="6" name="">
             <a:extLst xmlns:a="http://schemas.openxmlformats.org/drawingml/2006/main">
               <a:ext uri="{FF2B5EF4-FFF2-40B4-BE49-F238E27FC236}">
-                <a16:creationId xmlns:a16="http://schemas.microsoft.com/office/drawing/2014/main" id="{15BDA7D7-3FF2-49D0-9710-3AE12E0C7A5D}"/>
+                <a16:creationId xmlns:a16="http://schemas.microsoft.com/office/drawing/2014/main" id="{58BDC866-9CBB-4826-A9DF-1377BF51ACE6}"/>
               </a:ext>
             </a:extLst>
           </p:cNvPr>
@@ -10323,7 +10331,7 @@
           <p:cNvPr id="7" name="">
             <a:extLst xmlns:a="http://schemas.openxmlformats.org/drawingml/2006/main">
               <a:ext uri="{FF2B5EF4-FFF2-40B4-BE49-F238E27FC236}">
-                <a16:creationId xmlns:a16="http://schemas.microsoft.com/office/drawing/2014/main" id="{8D5600EF-3980-4223-A890-4F6D92B305BD}"/>
+                <a16:creationId xmlns:a16="http://schemas.microsoft.com/office/drawing/2014/main" id="{61BE2645-ABD3-4C4F-B03F-39AD33E41113}"/>
               </a:ext>
             </a:extLst>
           </p:cNvPr>
@@ -10355,7 +10363,7 @@
           <p:cNvPr id="8" name="">
             <a:extLst xmlns:a="http://schemas.openxmlformats.org/drawingml/2006/main">
               <a:ext uri="{FF2B5EF4-FFF2-40B4-BE49-F238E27FC236}">
-                <a16:creationId xmlns:a16="http://schemas.microsoft.com/office/drawing/2014/main" id="{877EBBAB-7563-49FA-8F7C-94948EB058AF}"/>
+                <a16:creationId xmlns:a16="http://schemas.microsoft.com/office/drawing/2014/main" id="{D9CE901A-91BC-4C38-83E0-41CC3B6B752A}"/>
               </a:ext>
             </a:extLst>
           </p:cNvPr>
@@ -10412,7 +10420,7 @@
           <p:cNvPr id="9" name="">
             <a:extLst xmlns:a="http://schemas.openxmlformats.org/drawingml/2006/main">
               <a:ext uri="{FF2B5EF4-FFF2-40B4-BE49-F238E27FC236}">
-                <a16:creationId xmlns:a16="http://schemas.microsoft.com/office/drawing/2014/main" id="{DE12F615-EA97-4E71-8B21-C3E4554D2F2C}"/>
+                <a16:creationId xmlns:a16="http://schemas.microsoft.com/office/drawing/2014/main" id="{F28AB80E-0420-4BB5-AC9F-AEF4A1AD2ECF}"/>
               </a:ext>
             </a:extLst>
           </p:cNvPr>
@@ -10469,7 +10477,7 @@
           <p:cNvPr id="10" name="">
             <a:extLst xmlns:a="http://schemas.openxmlformats.org/drawingml/2006/main">
               <a:ext uri="{FF2B5EF4-FFF2-40B4-BE49-F238E27FC236}">
-                <a16:creationId xmlns:a16="http://schemas.microsoft.com/office/drawing/2014/main" id="{4DBD0144-807A-42CE-A806-3954B8358C63}"/>
+                <a16:creationId xmlns:a16="http://schemas.microsoft.com/office/drawing/2014/main" id="{7A5E19DD-EDF8-4216-AD38-B512ABA759DB}"/>
               </a:ext>
             </a:extLst>
           </p:cNvPr>
@@ -10526,7 +10534,7 @@
           <p:cNvPr id="11" name="">
             <a:extLst xmlns:a="http://schemas.openxmlformats.org/drawingml/2006/main">
               <a:ext uri="{FF2B5EF4-FFF2-40B4-BE49-F238E27FC236}">
-                <a16:creationId xmlns:a16="http://schemas.microsoft.com/office/drawing/2014/main" id="{62D8DCA0-D04A-41FC-9043-A6DA95214838}"/>
+                <a16:creationId xmlns:a16="http://schemas.microsoft.com/office/drawing/2014/main" id="{D12A3E83-84E8-474F-B822-AEFCECE487F4}"/>
               </a:ext>
             </a:extLst>
           </p:cNvPr>
@@ -10583,7 +10591,7 @@
           <p:cNvPr id="12" name="">
             <a:extLst xmlns:a="http://schemas.openxmlformats.org/drawingml/2006/main">
               <a:ext uri="{FF2B5EF4-FFF2-40B4-BE49-F238E27FC236}">
-                <a16:creationId xmlns:a16="http://schemas.microsoft.com/office/drawing/2014/main" id="{AD43691C-05E5-4961-B2DF-480855E87531}"/>
+                <a16:creationId xmlns:a16="http://schemas.microsoft.com/office/drawing/2014/main" id="{F439D7EA-B92C-4A9E-BEA9-C63CF5BFDBC7}"/>
               </a:ext>
             </a:extLst>
           </p:cNvPr>
@@ -10640,7 +10648,7 @@
           <p:cNvPr id="13" name="">
             <a:extLst xmlns:a="http://schemas.openxmlformats.org/drawingml/2006/main">
               <a:ext uri="{FF2B5EF4-FFF2-40B4-BE49-F238E27FC236}">
-                <a16:creationId xmlns:a16="http://schemas.microsoft.com/office/drawing/2014/main" id="{36222030-586A-4939-97A4-4FA91E8B2F2A}"/>
+                <a16:creationId xmlns:a16="http://schemas.microsoft.com/office/drawing/2014/main" id="{688B0ECF-1D69-4BBF-8BAA-F43C2639002C}"/>
               </a:ext>
             </a:extLst>
           </p:cNvPr>
@@ -10697,7 +10705,7 @@
           <p:cNvPr id="14" name="">
             <a:extLst xmlns:a="http://schemas.openxmlformats.org/drawingml/2006/main">
               <a:ext uri="{FF2B5EF4-FFF2-40B4-BE49-F238E27FC236}">
-                <a16:creationId xmlns:a16="http://schemas.microsoft.com/office/drawing/2014/main" id="{533F7A6A-E646-4C73-BDF8-8C293F93185E}"/>
+                <a16:creationId xmlns:a16="http://schemas.microsoft.com/office/drawing/2014/main" id="{1B91FEE6-3E7D-4B88-99E8-A5D17A2A3FC0}"/>
               </a:ext>
             </a:extLst>
           </p:cNvPr>
@@ -10754,7 +10762,7 @@
           <p:cNvPr id="15" name="">
             <a:extLst xmlns:a="http://schemas.openxmlformats.org/drawingml/2006/main">
               <a:ext uri="{FF2B5EF4-FFF2-40B4-BE49-F238E27FC236}">
-                <a16:creationId xmlns:a16="http://schemas.microsoft.com/office/drawing/2014/main" id="{4CC7EB3A-CDE3-4D42-A99E-C291FF64617F}"/>
+                <a16:creationId xmlns:a16="http://schemas.microsoft.com/office/drawing/2014/main" id="{8ADC73E8-1DB4-467A-BDB4-1F9D5B69FE8E}"/>
               </a:ext>
             </a:extLst>
           </p:cNvPr>
@@ -10809,7 +10817,7 @@
     </p:spTree>
     <p:extLst>
       <p:ext uri="{BB962C8B-B14F-4D97-AF65-F5344CB8AC3E}">
-        <p14:creationId xmlns:p14="http://schemas.microsoft.com/office/powerpoint/2010/main" val="454474699"/>
+        <p14:creationId xmlns:p14="http://schemas.microsoft.com/office/powerpoint/2010/main" val="942442162"/>
       </p:ext>
     </p:extLst>
   </p:cSld>
@@ -10964,7 +10972,7 @@
           <p:cNvPr id="16" name="">
             <a:extLst xmlns:a="http://schemas.openxmlformats.org/drawingml/2006/main">
               <a:ext uri="{FF2B5EF4-FFF2-40B4-BE49-F238E27FC236}">
-                <a16:creationId xmlns:a16="http://schemas.microsoft.com/office/drawing/2014/main" id="{1ECEEB7F-9A04-478B-8EF9-408D74BFB27C}"/>
+                <a16:creationId xmlns:a16="http://schemas.microsoft.com/office/drawing/2014/main" id="{B4E883FE-C0FD-44BB-BE47-2E62D6BC97FA}"/>
               </a:ext>
             </a:extLst>
           </p:cNvPr>
@@ -10996,7 +11004,7 @@
           <p:cNvPr id="2" name="">
             <a:extLst xmlns:a="http://schemas.openxmlformats.org/drawingml/2006/main">
               <a:ext uri="{FF2B5EF4-FFF2-40B4-BE49-F238E27FC236}">
-                <a16:creationId xmlns:a16="http://schemas.microsoft.com/office/drawing/2014/main" id="{47AA800D-A8F2-4A88-B70B-CF5BB4595983}"/>
+                <a16:creationId xmlns:a16="http://schemas.microsoft.com/office/drawing/2014/main" id="{533391E9-0404-4A97-8653-96EA4C603C56}"/>
               </a:ext>
             </a:extLst>
           </p:cNvPr>
@@ -11053,7 +11061,7 @@
           <p:cNvPr id="3" name="">
             <a:extLst xmlns:a="http://schemas.openxmlformats.org/drawingml/2006/main">
               <a:ext uri="{FF2B5EF4-FFF2-40B4-BE49-F238E27FC236}">
-                <a16:creationId xmlns:a16="http://schemas.microsoft.com/office/drawing/2014/main" id="{DA04D506-E9B3-43B2-90DF-C5AD93397F0B}"/>
+                <a16:creationId xmlns:a16="http://schemas.microsoft.com/office/drawing/2014/main" id="{8439DBD8-76F0-47E2-B102-694F74B2B8C1}"/>
               </a:ext>
             </a:extLst>
           </p:cNvPr>
@@ -11085,7 +11093,7 @@
           <p:cNvPr id="4" name="">
             <a:extLst xmlns:a="http://schemas.openxmlformats.org/drawingml/2006/main">
               <a:ext uri="{FF2B5EF4-FFF2-40B4-BE49-F238E27FC236}">
-                <a16:creationId xmlns:a16="http://schemas.microsoft.com/office/drawing/2014/main" id="{AC59E119-A7AD-4796-AA42-4A41775E4DD0}"/>
+                <a16:creationId xmlns:a16="http://schemas.microsoft.com/office/drawing/2014/main" id="{E694EF74-2EA9-4DBC-8B00-0088BF9CD96C}"/>
               </a:ext>
             </a:extLst>
           </p:cNvPr>
@@ -11142,7 +11150,7 @@
           <p:cNvPr id="5" name="">
             <a:extLst xmlns:a="http://schemas.openxmlformats.org/drawingml/2006/main">
               <a:ext uri="{FF2B5EF4-FFF2-40B4-BE49-F238E27FC236}">
-                <a16:creationId xmlns:a16="http://schemas.microsoft.com/office/drawing/2014/main" id="{8F27BD2C-2564-4350-820E-09251F24ED74}"/>
+                <a16:creationId xmlns:a16="http://schemas.microsoft.com/office/drawing/2014/main" id="{8498E279-D171-4E63-AE53-0DD14C288C00}"/>
               </a:ext>
             </a:extLst>
           </p:cNvPr>
@@ -11199,7 +11207,7 @@
           <p:cNvPr id="6" name="">
             <a:extLst xmlns:a="http://schemas.openxmlformats.org/drawingml/2006/main">
               <a:ext uri="{FF2B5EF4-FFF2-40B4-BE49-F238E27FC236}">
-                <a16:creationId xmlns:a16="http://schemas.microsoft.com/office/drawing/2014/main" id="{114E45D6-34B3-4B47-BB01-F3B1DD2EC71E}"/>
+                <a16:creationId xmlns:a16="http://schemas.microsoft.com/office/drawing/2014/main" id="{8CAD9CDD-119B-4A97-A64D-EFCB18DD4CA4}"/>
               </a:ext>
             </a:extLst>
           </p:cNvPr>
@@ -11256,7 +11264,7 @@
           <p:cNvPr id="7" name="">
             <a:extLst xmlns:a="http://schemas.openxmlformats.org/drawingml/2006/main">
               <a:ext uri="{FF2B5EF4-FFF2-40B4-BE49-F238E27FC236}">
-                <a16:creationId xmlns:a16="http://schemas.microsoft.com/office/drawing/2014/main" id="{41FA9DF8-C2AD-4EE5-87B3-5F0E3849CF42}"/>
+                <a16:creationId xmlns:a16="http://schemas.microsoft.com/office/drawing/2014/main" id="{5F65CA83-12E3-4E1B-B629-3EDF64CBF86C}"/>
               </a:ext>
             </a:extLst>
           </p:cNvPr>
@@ -11288,7 +11296,7 @@
           <p:cNvPr id="8" name="">
             <a:extLst xmlns:a="http://schemas.openxmlformats.org/drawingml/2006/main">
               <a:ext uri="{FF2B5EF4-FFF2-40B4-BE49-F238E27FC236}">
-                <a16:creationId xmlns:a16="http://schemas.microsoft.com/office/drawing/2014/main" id="{1F928CCF-3DA5-41BB-8454-E185CE0F6701}"/>
+                <a16:creationId xmlns:a16="http://schemas.microsoft.com/office/drawing/2014/main" id="{EDCE39DF-7CA5-4929-ABAD-69A65DA46C97}"/>
               </a:ext>
             </a:extLst>
           </p:cNvPr>
@@ -11345,7 +11353,7 @@
           <p:cNvPr id="9" name="">
             <a:extLst xmlns:a="http://schemas.openxmlformats.org/drawingml/2006/main">
               <a:ext uri="{FF2B5EF4-FFF2-40B4-BE49-F238E27FC236}">
-                <a16:creationId xmlns:a16="http://schemas.microsoft.com/office/drawing/2014/main" id="{F75B5689-9A0E-4303-8710-E82400D5F530}"/>
+                <a16:creationId xmlns:a16="http://schemas.microsoft.com/office/drawing/2014/main" id="{28E7B346-C482-408C-83F5-75AE9221B3B3}"/>
               </a:ext>
             </a:extLst>
           </p:cNvPr>
@@ -11406,7 +11414,7 @@
           <p:nvPr/>
         </p:nvPicPr>
         <p:blipFill>
-          <a:blip xmlns:r="http://schemas.openxmlformats.org/officeDocument/2006/relationships" xmlns:a="http://schemas.openxmlformats.org/drawingml/2006/main" r:embed="R05c4d5b212994316"/>
+          <a:blip xmlns:r="http://schemas.openxmlformats.org/officeDocument/2006/relationships" xmlns:a="http://schemas.openxmlformats.org/drawingml/2006/main" r:embed="Rd066b216339f470b"/>
           <a:stretch xmlns:a="http://schemas.openxmlformats.org/drawingml/2006/main"/>
         </p:blipFill>
         <p:spPr>
@@ -11424,7 +11432,7 @@
           <p:cNvPr id="11" name="">
             <a:extLst xmlns:a="http://schemas.openxmlformats.org/drawingml/2006/main">
               <a:ext uri="{FF2B5EF4-FFF2-40B4-BE49-F238E27FC236}">
-                <a16:creationId xmlns:a16="http://schemas.microsoft.com/office/drawing/2014/main" id="{73EF8576-8566-4455-9E52-0147D61C98F5}"/>
+                <a16:creationId xmlns:a16="http://schemas.microsoft.com/office/drawing/2014/main" id="{CFE2AD5C-D43A-4D64-B48C-8DC9DB263FFB}"/>
               </a:ext>
             </a:extLst>
           </p:cNvPr>
@@ -11481,7 +11489,7 @@
           <p:cNvPr id="12" name="">
             <a:extLst xmlns:a="http://schemas.openxmlformats.org/drawingml/2006/main">
               <a:ext uri="{FF2B5EF4-FFF2-40B4-BE49-F238E27FC236}">
-                <a16:creationId xmlns:a16="http://schemas.microsoft.com/office/drawing/2014/main" id="{126630C9-3E89-426C-8C4E-5B7D7813BA8F}"/>
+                <a16:creationId xmlns:a16="http://schemas.microsoft.com/office/drawing/2014/main" id="{CE408A9C-A7B7-4BE9-B391-6FAE3FA9047D}"/>
               </a:ext>
             </a:extLst>
           </p:cNvPr>
@@ -11538,7 +11546,7 @@
           <p:cNvPr id="13" name="">
             <a:extLst xmlns:a="http://schemas.openxmlformats.org/drawingml/2006/main">
               <a:ext uri="{FF2B5EF4-FFF2-40B4-BE49-F238E27FC236}">
-                <a16:creationId xmlns:a16="http://schemas.microsoft.com/office/drawing/2014/main" id="{3F23BDB5-C4A2-457F-92F7-A7AC8A5F8512}"/>
+                <a16:creationId xmlns:a16="http://schemas.microsoft.com/office/drawing/2014/main" id="{125A9E12-1A71-4729-BF20-0D1C2CD9967A}"/>
               </a:ext>
             </a:extLst>
           </p:cNvPr>
@@ -11570,7 +11578,7 @@
           <p:cNvPr id="14" name="">
             <a:extLst xmlns:a="http://schemas.openxmlformats.org/drawingml/2006/main">
               <a:ext uri="{FF2B5EF4-FFF2-40B4-BE49-F238E27FC236}">
-                <a16:creationId xmlns:a16="http://schemas.microsoft.com/office/drawing/2014/main" id="{00A177E4-4424-4B8E-8F95-9E2E8935A05B}"/>
+                <a16:creationId xmlns:a16="http://schemas.microsoft.com/office/drawing/2014/main" id="{AADD1545-2D7B-40D1-8C01-7E2A8D53BF43}"/>
               </a:ext>
             </a:extLst>
           </p:cNvPr>
@@ -11627,7 +11635,7 @@
           <p:cNvPr id="15" name="">
             <a:extLst xmlns:a="http://schemas.openxmlformats.org/drawingml/2006/main">
               <a:ext uri="{FF2B5EF4-FFF2-40B4-BE49-F238E27FC236}">
-                <a16:creationId xmlns:a16="http://schemas.microsoft.com/office/drawing/2014/main" id="{2408BE6B-A05B-49AE-8CE1-2E76FABBCBC7}"/>
+                <a16:creationId xmlns:a16="http://schemas.microsoft.com/office/drawing/2014/main" id="{D332195E-C7D8-4849-932D-A312405358CC}"/>
               </a:ext>
             </a:extLst>
           </p:cNvPr>
@@ -11682,7 +11690,7 @@
     </p:spTree>
     <p:extLst>
       <p:ext uri="{BB962C8B-B14F-4D97-AF65-F5344CB8AC3E}">
-        <p14:creationId xmlns:p14="http://schemas.microsoft.com/office/powerpoint/2010/main" val="959405433"/>
+        <p14:creationId xmlns:p14="http://schemas.microsoft.com/office/powerpoint/2010/main" val="1012086024"/>
       </p:ext>
     </p:extLst>
   </p:cSld>
@@ -11837,7 +11845,7 @@
           <p:cNvPr id="23" name="">
             <a:extLst xmlns:a="http://schemas.openxmlformats.org/drawingml/2006/main">
               <a:ext uri="{FF2B5EF4-FFF2-40B4-BE49-F238E27FC236}">
-                <a16:creationId xmlns:a16="http://schemas.microsoft.com/office/drawing/2014/main" id="{29A13BF4-8D4B-4A8C-B194-F0F36A6DA79C}"/>
+                <a16:creationId xmlns:a16="http://schemas.microsoft.com/office/drawing/2014/main" id="{02692689-01AB-48AE-9C37-99D8D942C388}"/>
               </a:ext>
             </a:extLst>
           </p:cNvPr>
@@ -11869,7 +11877,7 @@
           <p:cNvPr id="2" name="">
             <a:extLst xmlns:a="http://schemas.openxmlformats.org/drawingml/2006/main">
               <a:ext uri="{FF2B5EF4-FFF2-40B4-BE49-F238E27FC236}">
-                <a16:creationId xmlns:a16="http://schemas.microsoft.com/office/drawing/2014/main" id="{B1448EC4-5EBF-46DF-B162-25ADE40A7DBE}"/>
+                <a16:creationId xmlns:a16="http://schemas.microsoft.com/office/drawing/2014/main" id="{85ACA8AF-EEBB-4C0C-B74C-95BD515A244C}"/>
               </a:ext>
             </a:extLst>
           </p:cNvPr>
@@ -11926,7 +11934,7 @@
           <p:cNvPr id="3" name="">
             <a:extLst xmlns:a="http://schemas.openxmlformats.org/drawingml/2006/main">
               <a:ext uri="{FF2B5EF4-FFF2-40B4-BE49-F238E27FC236}">
-                <a16:creationId xmlns:a16="http://schemas.microsoft.com/office/drawing/2014/main" id="{D3245EC8-33C8-4B3D-8424-46E5646854B8}"/>
+                <a16:creationId xmlns:a16="http://schemas.microsoft.com/office/drawing/2014/main" id="{091E67F3-6971-4DCB-9672-CA2282920CF6}"/>
               </a:ext>
             </a:extLst>
           </p:cNvPr>
@@ -11958,7 +11966,7 @@
           <p:cNvPr id="4" name="">
             <a:extLst xmlns:a="http://schemas.openxmlformats.org/drawingml/2006/main">
               <a:ext uri="{FF2B5EF4-FFF2-40B4-BE49-F238E27FC236}">
-                <a16:creationId xmlns:a16="http://schemas.microsoft.com/office/drawing/2014/main" id="{905C246A-0492-40C8-B90E-3EB8959BBA47}"/>
+                <a16:creationId xmlns:a16="http://schemas.microsoft.com/office/drawing/2014/main" id="{AD0FA364-8513-42EE-B26B-EA1D8CD002A9}"/>
               </a:ext>
             </a:extLst>
           </p:cNvPr>
@@ -12015,7 +12023,7 @@
           <p:cNvPr id="5" name="">
             <a:extLst xmlns:a="http://schemas.openxmlformats.org/drawingml/2006/main">
               <a:ext uri="{FF2B5EF4-FFF2-40B4-BE49-F238E27FC236}">
-                <a16:creationId xmlns:a16="http://schemas.microsoft.com/office/drawing/2014/main" id="{5462ABF5-5331-4252-863C-31512088D135}"/>
+                <a16:creationId xmlns:a16="http://schemas.microsoft.com/office/drawing/2014/main" id="{407C99E8-6BF3-4265-99ED-A09E21FCA049}"/>
               </a:ext>
             </a:extLst>
           </p:cNvPr>
@@ -12072,7 +12080,7 @@
           <p:cNvPr id="6" name="">
             <a:extLst xmlns:a="http://schemas.openxmlformats.org/drawingml/2006/main">
               <a:ext uri="{FF2B5EF4-FFF2-40B4-BE49-F238E27FC236}">
-                <a16:creationId xmlns:a16="http://schemas.microsoft.com/office/drawing/2014/main" id="{35B12C6A-1B3C-499C-BDF1-4563ABEDB3FC}"/>
+                <a16:creationId xmlns:a16="http://schemas.microsoft.com/office/drawing/2014/main" id="{A970DAB3-5998-41B1-BBC2-0DC5D5B4154B}"/>
               </a:ext>
             </a:extLst>
           </p:cNvPr>
@@ -12129,7 +12137,7 @@
           <p:cNvPr id="7" name="">
             <a:extLst xmlns:a="http://schemas.openxmlformats.org/drawingml/2006/main">
               <a:ext uri="{FF2B5EF4-FFF2-40B4-BE49-F238E27FC236}">
-                <a16:creationId xmlns:a16="http://schemas.microsoft.com/office/drawing/2014/main" id="{4D60185D-FC64-4518-97E3-670F8D83A926}"/>
+                <a16:creationId xmlns:a16="http://schemas.microsoft.com/office/drawing/2014/main" id="{CD5EB611-EE78-4F13-B30C-82758729E15B}"/>
               </a:ext>
             </a:extLst>
           </p:cNvPr>
@@ -12161,7 +12169,7 @@
           <p:cNvPr id="8" name="">
             <a:extLst xmlns:a="http://schemas.openxmlformats.org/drawingml/2006/main">
               <a:ext uri="{FF2B5EF4-FFF2-40B4-BE49-F238E27FC236}">
-                <a16:creationId xmlns:a16="http://schemas.microsoft.com/office/drawing/2014/main" id="{9B28F1AE-5BD8-4C83-BC0F-B369CED66491}"/>
+                <a16:creationId xmlns:a16="http://schemas.microsoft.com/office/drawing/2014/main" id="{9A7A2341-91F1-4794-8A16-3288C9C70728}"/>
               </a:ext>
             </a:extLst>
           </p:cNvPr>
@@ -12218,7 +12226,7 @@
           <p:cNvPr id="9" name="">
             <a:extLst xmlns:a="http://schemas.openxmlformats.org/drawingml/2006/main">
               <a:ext uri="{FF2B5EF4-FFF2-40B4-BE49-F238E27FC236}">
-                <a16:creationId xmlns:a16="http://schemas.microsoft.com/office/drawing/2014/main" id="{2C729C93-3F8B-41CD-B576-D718F08B1A64}"/>
+                <a16:creationId xmlns:a16="http://schemas.microsoft.com/office/drawing/2014/main" id="{786FA4D5-C8B9-4CE8-8473-3C1895725576}"/>
               </a:ext>
             </a:extLst>
           </p:cNvPr>
@@ -12275,7 +12283,7 @@
           <p:cNvPr id="10" name="">
             <a:extLst xmlns:a="http://schemas.openxmlformats.org/drawingml/2006/main">
               <a:ext uri="{FF2B5EF4-FFF2-40B4-BE49-F238E27FC236}">
-                <a16:creationId xmlns:a16="http://schemas.microsoft.com/office/drawing/2014/main" id="{8424CE8E-6AA6-4B42-A6E7-DAEB36365F90}"/>
+                <a16:creationId xmlns:a16="http://schemas.microsoft.com/office/drawing/2014/main" id="{4221F392-FEDA-4579-84A8-03A6F24EE333}"/>
               </a:ext>
             </a:extLst>
           </p:cNvPr>
@@ -12309,7 +12317,7 @@
           <p:cNvPr id="11" name="">
             <a:extLst xmlns:a="http://schemas.openxmlformats.org/drawingml/2006/main">
               <a:ext uri="{FF2B5EF4-FFF2-40B4-BE49-F238E27FC236}">
-                <a16:creationId xmlns:a16="http://schemas.microsoft.com/office/drawing/2014/main" id="{A3386039-1D79-4EDE-9CF7-CC787F4A8861}"/>
+                <a16:creationId xmlns:a16="http://schemas.microsoft.com/office/drawing/2014/main" id="{E3D3363C-1FD5-466D-80D3-0F3EB667312B}"/>
               </a:ext>
             </a:extLst>
           </p:cNvPr>
@@ -12341,7 +12349,7 @@
           <p:cNvPr id="12" name="">
             <a:extLst xmlns:a="http://schemas.openxmlformats.org/drawingml/2006/main">
               <a:ext uri="{FF2B5EF4-FFF2-40B4-BE49-F238E27FC236}">
-                <a16:creationId xmlns:a16="http://schemas.microsoft.com/office/drawing/2014/main" id="{CD4B86B9-EF62-4CDE-A220-1638E880F4D9}"/>
+                <a16:creationId xmlns:a16="http://schemas.microsoft.com/office/drawing/2014/main" id="{43FE8070-20FB-4A71-89BE-A5505935EE83}"/>
               </a:ext>
             </a:extLst>
           </p:cNvPr>
@@ -12398,7 +12406,7 @@
           <p:cNvPr id="13" name="">
             <a:extLst xmlns:a="http://schemas.openxmlformats.org/drawingml/2006/main">
               <a:ext uri="{FF2B5EF4-FFF2-40B4-BE49-F238E27FC236}">
-                <a16:creationId xmlns:a16="http://schemas.microsoft.com/office/drawing/2014/main" id="{C03FD486-76E8-4E84-9BE2-A0404A513B90}"/>
+                <a16:creationId xmlns:a16="http://schemas.microsoft.com/office/drawing/2014/main" id="{1BD796BE-0462-434F-8954-B8B4F7465C2B}"/>
               </a:ext>
             </a:extLst>
           </p:cNvPr>
@@ -12455,7 +12463,7 @@
           <p:cNvPr id="14" name="">
             <a:extLst xmlns:a="http://schemas.openxmlformats.org/drawingml/2006/main">
               <a:ext uri="{FF2B5EF4-FFF2-40B4-BE49-F238E27FC236}">
-                <a16:creationId xmlns:a16="http://schemas.microsoft.com/office/drawing/2014/main" id="{D8843B80-C7A8-42BC-BBAB-877602D01EFA}"/>
+                <a16:creationId xmlns:a16="http://schemas.microsoft.com/office/drawing/2014/main" id="{0B217B85-6D9B-46DC-8AB2-896F7825D7D6}"/>
               </a:ext>
             </a:extLst>
           </p:cNvPr>
@@ -12489,7 +12497,7 @@
           <p:cNvPr id="15" name="">
             <a:extLst xmlns:a="http://schemas.openxmlformats.org/drawingml/2006/main">
               <a:ext uri="{FF2B5EF4-FFF2-40B4-BE49-F238E27FC236}">
-                <a16:creationId xmlns:a16="http://schemas.microsoft.com/office/drawing/2014/main" id="{458789B7-B33E-4298-BC9B-8046E4998DA7}"/>
+                <a16:creationId xmlns:a16="http://schemas.microsoft.com/office/drawing/2014/main" id="{E39C2579-FD1F-466C-92D1-DFFC73DB966B}"/>
               </a:ext>
             </a:extLst>
           </p:cNvPr>
@@ -12521,7 +12529,7 @@
           <p:cNvPr id="16" name="">
             <a:extLst xmlns:a="http://schemas.openxmlformats.org/drawingml/2006/main">
               <a:ext uri="{FF2B5EF4-FFF2-40B4-BE49-F238E27FC236}">
-                <a16:creationId xmlns:a16="http://schemas.microsoft.com/office/drawing/2014/main" id="{0D3A7F18-3A09-4C85-805B-7907AFF95881}"/>
+                <a16:creationId xmlns:a16="http://schemas.microsoft.com/office/drawing/2014/main" id="{46151BD0-F5C1-41DB-9D14-495F90941C93}"/>
               </a:ext>
             </a:extLst>
           </p:cNvPr>
@@ -12578,7 +12586,7 @@
           <p:cNvPr id="17" name="">
             <a:extLst xmlns:a="http://schemas.openxmlformats.org/drawingml/2006/main">
               <a:ext uri="{FF2B5EF4-FFF2-40B4-BE49-F238E27FC236}">
-                <a16:creationId xmlns:a16="http://schemas.microsoft.com/office/drawing/2014/main" id="{A7DDCAD0-D273-4ED5-8A97-ED7910DFFF99}"/>
+                <a16:creationId xmlns:a16="http://schemas.microsoft.com/office/drawing/2014/main" id="{83F99CE4-C246-4D5A-885E-4DEB9CA55342}"/>
               </a:ext>
             </a:extLst>
           </p:cNvPr>
@@ -12635,7 +12643,7 @@
           <p:cNvPr id="18" name="">
             <a:extLst xmlns:a="http://schemas.openxmlformats.org/drawingml/2006/main">
               <a:ext uri="{FF2B5EF4-FFF2-40B4-BE49-F238E27FC236}">
-                <a16:creationId xmlns:a16="http://schemas.microsoft.com/office/drawing/2014/main" id="{7D5A6BA9-5F4E-4A67-AF75-4E3554E330A2}"/>
+                <a16:creationId xmlns:a16="http://schemas.microsoft.com/office/drawing/2014/main" id="{94FF4EA9-C23D-48E4-9B20-43D4629B608F}"/>
               </a:ext>
             </a:extLst>
           </p:cNvPr>
@@ -12669,7 +12677,7 @@
           <p:cNvPr id="19" name="">
             <a:extLst xmlns:a="http://schemas.openxmlformats.org/drawingml/2006/main">
               <a:ext uri="{FF2B5EF4-FFF2-40B4-BE49-F238E27FC236}">
-                <a16:creationId xmlns:a16="http://schemas.microsoft.com/office/drawing/2014/main" id="{6184817B-AD8B-4C70-9FE9-2316F6D1B8D8}"/>
+                <a16:creationId xmlns:a16="http://schemas.microsoft.com/office/drawing/2014/main" id="{2F3CE0E3-FCB0-4EB9-8B73-FD05DED09071}"/>
               </a:ext>
             </a:extLst>
           </p:cNvPr>
@@ -12701,7 +12709,7 @@
           <p:cNvPr id="20" name="">
             <a:extLst xmlns:a="http://schemas.openxmlformats.org/drawingml/2006/main">
               <a:ext uri="{FF2B5EF4-FFF2-40B4-BE49-F238E27FC236}">
-                <a16:creationId xmlns:a16="http://schemas.microsoft.com/office/drawing/2014/main" id="{C611B8BB-C34D-4853-8DD5-29B28D3B86CA}"/>
+                <a16:creationId xmlns:a16="http://schemas.microsoft.com/office/drawing/2014/main" id="{FA590A94-E842-4857-A0AF-4419A9BD442E}"/>
               </a:ext>
             </a:extLst>
           </p:cNvPr>
@@ -12758,7 +12766,7 @@
           <p:cNvPr id="21" name="">
             <a:extLst xmlns:a="http://schemas.openxmlformats.org/drawingml/2006/main">
               <a:ext uri="{FF2B5EF4-FFF2-40B4-BE49-F238E27FC236}">
-                <a16:creationId xmlns:a16="http://schemas.microsoft.com/office/drawing/2014/main" id="{930E7030-909F-4EE1-A0A8-908ED80E0E13}"/>
+                <a16:creationId xmlns:a16="http://schemas.microsoft.com/office/drawing/2014/main" id="{9C0C55E3-2CBF-4073-9FED-D6CFF032F583}"/>
               </a:ext>
             </a:extLst>
           </p:cNvPr>
@@ -12815,7 +12823,7 @@
           <p:cNvPr id="22" name="">
             <a:extLst xmlns:a="http://schemas.openxmlformats.org/drawingml/2006/main">
               <a:ext uri="{FF2B5EF4-FFF2-40B4-BE49-F238E27FC236}">
-                <a16:creationId xmlns:a16="http://schemas.microsoft.com/office/drawing/2014/main" id="{9C800EBA-0E94-41FD-BF51-4EE85E5EB3ED}"/>
+                <a16:creationId xmlns:a16="http://schemas.microsoft.com/office/drawing/2014/main" id="{05703EBE-0E3B-4A1D-A427-7379DA6DEE80}"/>
               </a:ext>
             </a:extLst>
           </p:cNvPr>
@@ -12870,7 +12878,7 @@
     </p:spTree>
     <p:extLst>
       <p:ext uri="{BB962C8B-B14F-4D97-AF65-F5344CB8AC3E}">
-        <p14:creationId xmlns:p14="http://schemas.microsoft.com/office/powerpoint/2010/main" val="1236178646"/>
+        <p14:creationId xmlns:p14="http://schemas.microsoft.com/office/powerpoint/2010/main" val="230000147"/>
       </p:ext>
     </p:extLst>
   </p:cSld>
@@ -13071,7 +13079,7 @@
           <p:cNvPr id="22" name="">
             <a:extLst xmlns:a="http://schemas.openxmlformats.org/drawingml/2006/main">
               <a:ext uri="{FF2B5EF4-FFF2-40B4-BE49-F238E27FC236}">
-                <a16:creationId xmlns:a16="http://schemas.microsoft.com/office/drawing/2014/main" id="{47AD53EF-D1B9-4831-9B16-1E885B964517}"/>
+                <a16:creationId xmlns:a16="http://schemas.microsoft.com/office/drawing/2014/main" id="{716F54F8-A77E-4C06-AF2E-D51958FD85F2}"/>
               </a:ext>
             </a:extLst>
           </p:cNvPr>
@@ -13103,7 +13111,7 @@
           <p:cNvPr id="2" name="">
             <a:extLst xmlns:a="http://schemas.openxmlformats.org/drawingml/2006/main">
               <a:ext uri="{FF2B5EF4-FFF2-40B4-BE49-F238E27FC236}">
-                <a16:creationId xmlns:a16="http://schemas.microsoft.com/office/drawing/2014/main" id="{8A52C86C-50F0-4525-AEF0-98222A70FF77}"/>
+                <a16:creationId xmlns:a16="http://schemas.microsoft.com/office/drawing/2014/main" id="{311E7331-D211-4831-953D-20CB0C4C409D}"/>
               </a:ext>
             </a:extLst>
           </p:cNvPr>
@@ -13160,7 +13168,7 @@
           <p:cNvPr id="3" name="">
             <a:extLst xmlns:a="http://schemas.openxmlformats.org/drawingml/2006/main">
               <a:ext uri="{FF2B5EF4-FFF2-40B4-BE49-F238E27FC236}">
-                <a16:creationId xmlns:a16="http://schemas.microsoft.com/office/drawing/2014/main" id="{C7C93BEF-A663-4097-8D84-3DD677316BF0}"/>
+                <a16:creationId xmlns:a16="http://schemas.microsoft.com/office/drawing/2014/main" id="{6444EADA-B4E8-478D-B67E-E4CB7A53DF89}"/>
               </a:ext>
             </a:extLst>
           </p:cNvPr>
@@ -13192,7 +13200,7 @@
           <p:cNvPr id="4" name="">
             <a:extLst xmlns:a="http://schemas.openxmlformats.org/drawingml/2006/main">
               <a:ext uri="{FF2B5EF4-FFF2-40B4-BE49-F238E27FC236}">
-                <a16:creationId xmlns:a16="http://schemas.microsoft.com/office/drawing/2014/main" id="{309FDEFD-A9D5-473F-89BC-D1152B3C71B5}"/>
+                <a16:creationId xmlns:a16="http://schemas.microsoft.com/office/drawing/2014/main" id="{9CA8D0BF-D450-42CE-B4C4-F1F9C5598441}"/>
               </a:ext>
             </a:extLst>
           </p:cNvPr>
@@ -13249,7 +13257,7 @@
           <p:cNvPr id="5" name="">
             <a:extLst xmlns:a="http://schemas.openxmlformats.org/drawingml/2006/main">
               <a:ext uri="{FF2B5EF4-FFF2-40B4-BE49-F238E27FC236}">
-                <a16:creationId xmlns:a16="http://schemas.microsoft.com/office/drawing/2014/main" id="{8C59C28A-AE67-479D-AA8B-9417608A9E4A}"/>
+                <a16:creationId xmlns:a16="http://schemas.microsoft.com/office/drawing/2014/main" id="{3D9B98A1-8D2F-4FE4-B662-5AD1209686B6}"/>
               </a:ext>
             </a:extLst>
           </p:cNvPr>
@@ -13306,7 +13314,7 @@
           <p:cNvPr id="6" name="">
             <a:extLst xmlns:a="http://schemas.openxmlformats.org/drawingml/2006/main">
               <a:ext uri="{FF2B5EF4-FFF2-40B4-BE49-F238E27FC236}">
-                <a16:creationId xmlns:a16="http://schemas.microsoft.com/office/drawing/2014/main" id="{8EEE0A29-9C10-42FA-A723-3B354B4DD06A}"/>
+                <a16:creationId xmlns:a16="http://schemas.microsoft.com/office/drawing/2014/main" id="{4C62BF96-4459-4381-950C-EFDAFE21C5B6}"/>
               </a:ext>
             </a:extLst>
           </p:cNvPr>
@@ -13363,7 +13371,7 @@
           <p:cNvPr id="7" name="">
             <a:extLst xmlns:a="http://schemas.openxmlformats.org/drawingml/2006/main">
               <a:ext uri="{FF2B5EF4-FFF2-40B4-BE49-F238E27FC236}">
-                <a16:creationId xmlns:a16="http://schemas.microsoft.com/office/drawing/2014/main" id="{BE3E2F9F-2116-4A12-89BB-4472A3F2B890}"/>
+                <a16:creationId xmlns:a16="http://schemas.microsoft.com/office/drawing/2014/main" id="{35A131A8-6AED-465A-B9A7-0E9DDA1C2267}"/>
               </a:ext>
             </a:extLst>
           </p:cNvPr>
@@ -13395,7 +13403,7 @@
           <p:cNvPr id="8" name="">
             <a:extLst xmlns:a="http://schemas.openxmlformats.org/drawingml/2006/main">
               <a:ext uri="{FF2B5EF4-FFF2-40B4-BE49-F238E27FC236}">
-                <a16:creationId xmlns:a16="http://schemas.microsoft.com/office/drawing/2014/main" id="{49831DB9-8140-4EFD-88D2-029AEF3B4D3E}"/>
+                <a16:creationId xmlns:a16="http://schemas.microsoft.com/office/drawing/2014/main" id="{AE65EF18-730B-4313-8883-652B3FFF7B97}"/>
               </a:ext>
             </a:extLst>
           </p:cNvPr>
@@ -13452,7 +13460,7 @@
           <p:cNvPr id="9" name="">
             <a:extLst xmlns:a="http://schemas.openxmlformats.org/drawingml/2006/main">
               <a:ext uri="{FF2B5EF4-FFF2-40B4-BE49-F238E27FC236}">
-                <a16:creationId xmlns:a16="http://schemas.microsoft.com/office/drawing/2014/main" id="{77463C9D-4D0E-4111-85B7-DA33694118DA}"/>
+                <a16:creationId xmlns:a16="http://schemas.microsoft.com/office/drawing/2014/main" id="{D825ECD9-3D48-47DC-9A9F-F451D126F969}"/>
               </a:ext>
             </a:extLst>
           </p:cNvPr>
@@ -13509,7 +13517,7 @@
           <p:cNvPr id="10" name="">
             <a:extLst xmlns:a="http://schemas.openxmlformats.org/drawingml/2006/main">
               <a:ext uri="{FF2B5EF4-FFF2-40B4-BE49-F238E27FC236}">
-                <a16:creationId xmlns:a16="http://schemas.microsoft.com/office/drawing/2014/main" id="{02DD987A-AE10-4AEE-BBEA-2DE28446911E}"/>
+                <a16:creationId xmlns:a16="http://schemas.microsoft.com/office/drawing/2014/main" id="{6E7487AA-92F1-437C-B9F0-665BA76B6911}"/>
               </a:ext>
             </a:extLst>
           </p:cNvPr>
@@ -13543,7 +13551,7 @@
           <p:cNvPr id="11" name="">
             <a:extLst xmlns:a="http://schemas.openxmlformats.org/drawingml/2006/main">
               <a:ext uri="{FF2B5EF4-FFF2-40B4-BE49-F238E27FC236}">
-                <a16:creationId xmlns:a16="http://schemas.microsoft.com/office/drawing/2014/main" id="{C41A8033-C545-4B65-ABD6-ABFCE4DE996A}"/>
+                <a16:creationId xmlns:a16="http://schemas.microsoft.com/office/drawing/2014/main" id="{D59DEDE9-ABF0-400B-9699-11EAA95DBCBC}"/>
               </a:ext>
             </a:extLst>
           </p:cNvPr>
@@ -13575,7 +13583,7 @@
           <p:cNvPr id="12" name="">
             <a:extLst xmlns:a="http://schemas.openxmlformats.org/drawingml/2006/main">
               <a:ext uri="{FF2B5EF4-FFF2-40B4-BE49-F238E27FC236}">
-                <a16:creationId xmlns:a16="http://schemas.microsoft.com/office/drawing/2014/main" id="{8204B240-A1D2-448C-82CC-688F19D546B2}"/>
+                <a16:creationId xmlns:a16="http://schemas.microsoft.com/office/drawing/2014/main" id="{E6FD4D57-323E-417A-9BBE-E350655D9D17}"/>
               </a:ext>
             </a:extLst>
           </p:cNvPr>
@@ -13632,7 +13640,7 @@
           <p:cNvPr id="13" name="">
             <a:extLst xmlns:a="http://schemas.openxmlformats.org/drawingml/2006/main">
               <a:ext uri="{FF2B5EF4-FFF2-40B4-BE49-F238E27FC236}">
-                <a16:creationId xmlns:a16="http://schemas.microsoft.com/office/drawing/2014/main" id="{2AA72EC9-9F24-4287-9C4C-A6BC22CC14A0}"/>
+                <a16:creationId xmlns:a16="http://schemas.microsoft.com/office/drawing/2014/main" id="{C977AB53-554C-4DDC-86DE-D79B3A50DBD7}"/>
               </a:ext>
             </a:extLst>
           </p:cNvPr>
@@ -13689,7 +13697,7 @@
           <p:cNvPr id="14" name="">
             <a:extLst xmlns:a="http://schemas.openxmlformats.org/drawingml/2006/main">
               <a:ext uri="{FF2B5EF4-FFF2-40B4-BE49-F238E27FC236}">
-                <a16:creationId xmlns:a16="http://schemas.microsoft.com/office/drawing/2014/main" id="{12FD6190-F741-4D66-B125-9FE3EA5B8309}"/>
+                <a16:creationId xmlns:a16="http://schemas.microsoft.com/office/drawing/2014/main" id="{CBDC8720-130C-4180-A46F-20C87232CF0F}"/>
               </a:ext>
             </a:extLst>
           </p:cNvPr>
@@ -13723,7 +13731,7 @@
           <p:cNvPr id="15" name="">
             <a:extLst xmlns:a="http://schemas.openxmlformats.org/drawingml/2006/main">
               <a:ext uri="{FF2B5EF4-FFF2-40B4-BE49-F238E27FC236}">
-                <a16:creationId xmlns:a16="http://schemas.microsoft.com/office/drawing/2014/main" id="{78D7AF3D-B42A-46CD-8FDD-186BBF1D97DF}"/>
+                <a16:creationId xmlns:a16="http://schemas.microsoft.com/office/drawing/2014/main" id="{0EDB9268-B31E-4BF1-B2C2-CA75E07C9D6A}"/>
               </a:ext>
             </a:extLst>
           </p:cNvPr>
@@ -13755,7 +13763,7 @@
           <p:cNvPr id="16" name="">
             <a:extLst xmlns:a="http://schemas.openxmlformats.org/drawingml/2006/main">
               <a:ext uri="{FF2B5EF4-FFF2-40B4-BE49-F238E27FC236}">
-                <a16:creationId xmlns:a16="http://schemas.microsoft.com/office/drawing/2014/main" id="{FC30BBE9-C5C7-4132-A6E0-9A9DBB0B3EBC}"/>
+                <a16:creationId xmlns:a16="http://schemas.microsoft.com/office/drawing/2014/main" id="{7FDA99FB-266E-4AFB-95F4-2E8D49C94456}"/>
               </a:ext>
             </a:extLst>
           </p:cNvPr>
@@ -13812,7 +13820,7 @@
           <p:cNvPr id="17" name="">
             <a:extLst xmlns:a="http://schemas.openxmlformats.org/drawingml/2006/main">
               <a:ext uri="{FF2B5EF4-FFF2-40B4-BE49-F238E27FC236}">
-                <a16:creationId xmlns:a16="http://schemas.microsoft.com/office/drawing/2014/main" id="{42C5CFA5-F30E-4025-9CBF-73F0C5BEA3B1}"/>
+                <a16:creationId xmlns:a16="http://schemas.microsoft.com/office/drawing/2014/main" id="{965C6778-A053-4A7F-AACC-C4C03A25911B}"/>
               </a:ext>
             </a:extLst>
           </p:cNvPr>
@@ -13869,7 +13877,7 @@
           <p:cNvPr id="18" name="">
             <a:extLst xmlns:a="http://schemas.openxmlformats.org/drawingml/2006/main">
               <a:ext uri="{FF2B5EF4-FFF2-40B4-BE49-F238E27FC236}">
-                <a16:creationId xmlns:a16="http://schemas.microsoft.com/office/drawing/2014/main" id="{F278182E-71F2-4CE2-9BEF-69E18E931BFC}"/>
+                <a16:creationId xmlns:a16="http://schemas.microsoft.com/office/drawing/2014/main" id="{46ABEEA0-73BB-4141-896E-C90BC2FDF63A}"/>
               </a:ext>
             </a:extLst>
           </p:cNvPr>
@@ -13903,7 +13911,7 @@
           <p:cNvPr id="19" name="">
             <a:extLst xmlns:a="http://schemas.openxmlformats.org/drawingml/2006/main">
               <a:ext uri="{FF2B5EF4-FFF2-40B4-BE49-F238E27FC236}">
-                <a16:creationId xmlns:a16="http://schemas.microsoft.com/office/drawing/2014/main" id="{F4E07AF5-AF28-430B-A9CD-9346E134DFF4}"/>
+                <a16:creationId xmlns:a16="http://schemas.microsoft.com/office/drawing/2014/main" id="{9C2A55AC-C277-479E-9D0B-E2D8C16ABC9F}"/>
               </a:ext>
             </a:extLst>
           </p:cNvPr>
@@ -13935,7 +13943,7 @@
           <p:cNvPr id="20" name="">
             <a:extLst xmlns:a="http://schemas.openxmlformats.org/drawingml/2006/main">
               <a:ext uri="{FF2B5EF4-FFF2-40B4-BE49-F238E27FC236}">
-                <a16:creationId xmlns:a16="http://schemas.microsoft.com/office/drawing/2014/main" id="{D059CA6D-8357-4C37-BAE0-FFABE551BE0F}"/>
+                <a16:creationId xmlns:a16="http://schemas.microsoft.com/office/drawing/2014/main" id="{6976D216-F897-4887-8B9E-729B14EA5DC9}"/>
               </a:ext>
             </a:extLst>
           </p:cNvPr>
@@ -13992,7 +14000,7 @@
           <p:cNvPr id="21" name="">
             <a:extLst xmlns:a="http://schemas.openxmlformats.org/drawingml/2006/main">
               <a:ext uri="{FF2B5EF4-FFF2-40B4-BE49-F238E27FC236}">
-                <a16:creationId xmlns:a16="http://schemas.microsoft.com/office/drawing/2014/main" id="{1C558CA1-926C-44F6-90C4-65484E65F882}"/>
+                <a16:creationId xmlns:a16="http://schemas.microsoft.com/office/drawing/2014/main" id="{EE26EB59-F55B-4684-A886-EC5626A3511B}"/>
               </a:ext>
             </a:extLst>
           </p:cNvPr>
@@ -14047,7 +14055,7 @@
     </p:spTree>
     <p:extLst>
       <p:ext uri="{BB962C8B-B14F-4D97-AF65-F5344CB8AC3E}">
-        <p14:creationId xmlns:p14="http://schemas.microsoft.com/office/powerpoint/2010/main" val="1399963463"/>
+        <p14:creationId xmlns:p14="http://schemas.microsoft.com/office/powerpoint/2010/main" val="2014773138"/>
       </p:ext>
     </p:extLst>
   </p:cSld>
